--- a/Clase_3/PPT/Clase03_GaussMarkov_BLUE.pptx
+++ b/Clase_3/PPT/Clase03_GaussMarkov_BLUE.pptx
@@ -4,6 +4,9 @@
   <p:sldMasterIdLst>
     <p:sldMasterId id="2147483648" r:id="rId1"/>
   </p:sldMasterIdLst>
+  <p:notesMasterIdLst>
+    <p:notesMasterId r:id="rId11"/>
+  </p:notesMasterIdLst>
   <p:sldIdLst>
     <p:sldId id="256" r:id="rId2"/>
     <p:sldId id="257" r:id="rId3"/>
@@ -15,10 +18,7 @@
     <p:sldId id="263" r:id="rId9"/>
     <p:sldId id="264" r:id="rId10"/>
   </p:sldIdLst>
-  <p:notesMasterIdLst>
-    <p:notesMasterId r:id="rId11"/>
-  </p:notesMasterIdLst>
-  <p:sldSz cx="9144000" cy="5143500"/>
+  <p:sldSz cx="9144000" cy="5143500" type="screen16x9"/>
   <p:notesSz cx="5143500" cy="9144000"/>
   <p:defaultTextStyle>
     <a:lvl1pPr marL="0" algn="l" defTabSz="914400" rtl="0" eaLnBrk="1" latinLnBrk="0" hangingPunct="1">
@@ -112,6 +112,11 @@
       </a:defRPr>
     </a:lvl9pPr>
   </p:defaultTextStyle>
+  <p:extLst>
+    <p:ext uri="{EFAFB233-063F-42B5-8137-9DF3F51BA10A}">
+      <p15:sldGuideLst xmlns:p15="http://schemas.microsoft.com/office/powerpoint/2012/main"/>
+    </p:ext>
+  </p:extLst>
 </p:presentation>
 </file>
 
@@ -137,234 +142,10 @@
           <a:chExt cx="0" cy="0"/>
         </a:xfrm>
       </p:grpSpPr>
-      <p:sp>
-        <p:nvSpPr>
-          <p:cNvPr id="2" name="Header Placeholder 1"/>
-          <p:cNvSpPr>
-            <a:spLocks noGrp="1"/>
-          </p:cNvSpPr>
-          <p:nvPr>
-            <p:ph type="hdr" sz="quarter"/>
-          </p:nvPr>
-        </p:nvSpPr>
-        <p:spPr>
-          <a:xfrm>
-            <a:off x="0" y="0"/>
-            <a:ext cx="2971800" cy="458788"/>
-          </a:xfrm>
-          <a:prstGeom prst="rect">
-            <a:avLst/>
-          </a:prstGeom>
-        </p:spPr>
-        <p:txBody>
-          <a:bodyPr vert="horz" lIns="91440" tIns="45720" rIns="91440" bIns="45720" rtlCol="0"/>
-          <a:lstStyle>
-            <a:lvl1pPr algn="l">
-              <a:defRPr sz="1200"/>
-            </a:lvl1pPr>
-          </a:lstStyle>
-          <a:p>
-            <a:endParaRPr lang="en-US"/>
-          </a:p>
-        </p:txBody>
-      </p:sp>
-      <p:sp>
-        <p:nvSpPr>
-          <p:cNvPr id="3" name="Date Placeholder 2"/>
-          <p:cNvSpPr>
-            <a:spLocks noGrp="1"/>
-          </p:cNvSpPr>
-          <p:nvPr>
-            <p:ph type="dt" idx="1"/>
-          </p:nvPr>
-        </p:nvSpPr>
-        <p:spPr>
-          <a:xfrm>
-            <a:off x="3884613" y="0"/>
-            <a:ext cx="2971800" cy="458788"/>
-          </a:xfrm>
-          <a:prstGeom prst="rect">
-            <a:avLst/>
-          </a:prstGeom>
-        </p:spPr>
-        <p:txBody>
-          <a:bodyPr vert="horz" lIns="91440" tIns="45720" rIns="91440" bIns="45720" rtlCol="0"/>
-          <a:lstStyle>
-            <a:lvl1pPr algn="r">
-              <a:defRPr sz="1200"/>
-            </a:lvl1pPr>
-          </a:lstStyle>
-          <a:p>
-            <a:fld id="{5282F153-3F37-0F45-9E97-73ACFA13230C}" type="datetimeFigureOut">
-              <a:rPr lang="en-US"/>
-              <a:t>7/23/19</a:t>
-            </a:fld>
-            <a:endParaRPr lang="en-US"/>
-          </a:p>
-        </p:txBody>
-      </p:sp>
-      <p:sp>
-        <p:nvSpPr>
-          <p:cNvPr id="4" name="Slide Image Placeholder 3"/>
-          <p:cNvSpPr>
-            <a:spLocks noGrp="1" noRot="1" noChangeAspect="1"/>
-          </p:cNvSpPr>
-          <p:nvPr>
-            <p:ph type="sldImg" idx="2"/>
-          </p:nvPr>
-        </p:nvSpPr>
-        <p:spPr>
-          <a:xfrm>
-            <a:off x="685800" y="1143000"/>
-            <a:ext cx="5486400" cy="3086100"/>
-          </a:xfrm>
-          <a:prstGeom prst="rect">
-            <a:avLst/>
-          </a:prstGeom>
-          <a:noFill/>
-          <a:ln w="12700">
-            <a:solidFill>
-              <a:prstClr val="black"/>
-            </a:solidFill>
-          </a:ln>
-        </p:spPr>
-        <p:txBody>
-          <a:bodyPr vert="horz" lIns="91440" tIns="45720" rIns="91440" bIns="45720" rtlCol="0" anchor="ctr"/>
-          <a:lstStyle/>
-          <a:p>
-            <a:endParaRPr lang="en-US"/>
-          </a:p>
-        </p:txBody>
-      </p:sp>
-      <p:sp>
-        <p:nvSpPr>
-          <p:cNvPr id="5" name="Notes Placeholder 4"/>
-          <p:cNvSpPr>
-            <a:spLocks noGrp="1"/>
-          </p:cNvSpPr>
-          <p:nvPr>
-            <p:ph type="body" sz="quarter" idx="3"/>
-          </p:nvPr>
-        </p:nvSpPr>
-        <p:spPr>
-          <a:xfrm>
-            <a:off x="685800" y="4400550"/>
-            <a:ext cx="5486400" cy="3600450"/>
-          </a:xfrm>
-          <a:prstGeom prst="rect">
-            <a:avLst/>
-          </a:prstGeom>
-        </p:spPr>
-        <p:txBody>
-          <a:bodyPr vert="horz" lIns="91440" tIns="45720" rIns="91440" bIns="45720" rtlCol="0"/>
-          <a:lstStyle/>
-          <a:p>
-            <a:pPr lvl="0"/>
-            <a:r>
-              <a:rPr lang="en-US"/>
-              <a:t>Click to edit Master text styles</a:t>
-            </a:r>
-          </a:p>
-          <a:p>
-            <a:pPr lvl="1"/>
-            <a:r>
-              <a:rPr lang="en-US"/>
-              <a:t>Second level</a:t>
-            </a:r>
-          </a:p>
-          <a:p>
-            <a:pPr lvl="2"/>
-            <a:r>
-              <a:rPr lang="en-US"/>
-              <a:t>Third level</a:t>
-            </a:r>
-          </a:p>
-          <a:p>
-            <a:pPr lvl="3"/>
-            <a:r>
-              <a:rPr lang="en-US"/>
-              <a:t>Fourth level</a:t>
-            </a:r>
-          </a:p>
-          <a:p>
-            <a:pPr lvl="4"/>
-            <a:r>
-              <a:rPr lang="en-US"/>
-              <a:t>Fifth level</a:t>
-            </a:r>
-          </a:p>
-        </p:txBody>
-      </p:sp>
-      <p:sp>
-        <p:nvSpPr>
-          <p:cNvPr id="6" name="Footer Placeholder 5"/>
-          <p:cNvSpPr>
-            <a:spLocks noGrp="1"/>
-          </p:cNvSpPr>
-          <p:nvPr>
-            <p:ph type="ftr" sz="quarter" idx="4"/>
-          </p:nvPr>
-        </p:nvSpPr>
-        <p:spPr>
-          <a:xfrm>
-            <a:off x="0" y="8685213"/>
-            <a:ext cx="2971800" cy="458787"/>
-          </a:xfrm>
-          <a:prstGeom prst="rect">
-            <a:avLst/>
-          </a:prstGeom>
-        </p:spPr>
-        <p:txBody>
-          <a:bodyPr vert="horz" lIns="91440" tIns="45720" rIns="91440" bIns="45720" rtlCol="0" anchor="b"/>
-          <a:lstStyle>
-            <a:lvl1pPr algn="l">
-              <a:defRPr sz="1200"/>
-            </a:lvl1pPr>
-          </a:lstStyle>
-          <a:p>
-            <a:endParaRPr lang="en-US"/>
-          </a:p>
-        </p:txBody>
-      </p:sp>
-      <p:sp>
-        <p:nvSpPr>
-          <p:cNvPr id="7" name="Slide Number Placeholder 6"/>
-          <p:cNvSpPr>
-            <a:spLocks noGrp="1"/>
-          </p:cNvSpPr>
-          <p:nvPr>
-            <p:ph type="sldNum" sz="quarter" idx="5"/>
-          </p:nvPr>
-        </p:nvSpPr>
-        <p:spPr>
-          <a:xfrm>
-            <a:off x="3884613" y="8685213"/>
-            <a:ext cx="2971800" cy="458787"/>
-          </a:xfrm>
-          <a:prstGeom prst="rect">
-            <a:avLst/>
-          </a:prstGeom>
-        </p:spPr>
-        <p:txBody>
-          <a:bodyPr vert="horz" lIns="91440" tIns="45720" rIns="91440" bIns="45720" rtlCol="0" anchor="b"/>
-          <a:lstStyle>
-            <a:lvl1pPr algn="r">
-              <a:defRPr sz="1200"/>
-            </a:lvl1pPr>
-          </a:lstStyle>
-          <a:p>
-            <a:fld id="{CE5E9CC1-C706-0F49-92D6-E571CC5EEA8F}" type="slidenum">
-              <a:rPr lang="en-US"/>
-              <a:t>‹#›</a:t>
-            </a:fld>
-            <a:endParaRPr lang="en-US"/>
-          </a:p>
-        </p:txBody>
-      </p:sp>
     </p:spTree>
     <p:extLst>
       <p:ext uri="{BB962C8B-B14F-4D97-AF65-F5344CB8AC3E}">
-        <p14:creationId xmlns:p14="http://schemas.microsoft.com/office/powerpoint/2010/main" val="1024086991"/>
+        <p14:creationId xmlns:p14="http://schemas.microsoft.com/office/powerpoint/2010/main" val="554690439"/>
       </p:ext>
     </p:extLst>
   </p:cSld>
@@ -508,10 +289,6 @@
           <a:bodyPr/>
           <a:lstStyle/>
           <a:p>
-            <a:r>
-              <a:rPr lang="en-US" dirty="0"/>
-              <a:t/>
-            </a:r>
             <a:endParaRPr lang="en-US" dirty="0"/>
           </a:p>
         </p:txBody>
@@ -596,10 +373,6 @@
           <a:bodyPr/>
           <a:lstStyle/>
           <a:p>
-            <a:r>
-              <a:rPr lang="en-US" dirty="0"/>
-              <a:t/>
-            </a:r>
             <a:endParaRPr lang="en-US" dirty="0"/>
           </a:p>
         </p:txBody>
@@ -684,10 +457,6 @@
           <a:bodyPr/>
           <a:lstStyle/>
           <a:p>
-            <a:r>
-              <a:rPr lang="en-US" dirty="0"/>
-              <a:t/>
-            </a:r>
             <a:endParaRPr lang="en-US" dirty="0"/>
           </a:p>
         </p:txBody>
@@ -772,10 +541,6 @@
           <a:bodyPr/>
           <a:lstStyle/>
           <a:p>
-            <a:r>
-              <a:rPr lang="en-US" dirty="0"/>
-              <a:t/>
-            </a:r>
             <a:endParaRPr lang="en-US" dirty="0"/>
           </a:p>
         </p:txBody>
@@ -860,10 +625,6 @@
           <a:bodyPr/>
           <a:lstStyle/>
           <a:p>
-            <a:r>
-              <a:rPr lang="en-US" dirty="0"/>
-              <a:t/>
-            </a:r>
             <a:endParaRPr lang="en-US" dirty="0"/>
           </a:p>
         </p:txBody>
@@ -948,10 +709,6 @@
           <a:bodyPr/>
           <a:lstStyle/>
           <a:p>
-            <a:r>
-              <a:rPr lang="en-US" dirty="0"/>
-              <a:t/>
-            </a:r>
             <a:endParaRPr lang="en-US" dirty="0"/>
           </a:p>
         </p:txBody>
@@ -1036,10 +793,6 @@
           <a:bodyPr/>
           <a:lstStyle/>
           <a:p>
-            <a:r>
-              <a:rPr lang="en-US" dirty="0"/>
-              <a:t/>
-            </a:r>
             <a:endParaRPr lang="en-US" dirty="0"/>
           </a:p>
         </p:txBody>
@@ -1124,10 +877,6 @@
           <a:bodyPr/>
           <a:lstStyle/>
           <a:p>
-            <a:r>
-              <a:rPr lang="en-US" dirty="0"/>
-              <a:t/>
-            </a:r>
             <a:endParaRPr lang="en-US" dirty="0"/>
           </a:p>
         </p:txBody>
@@ -1212,10 +961,6 @@
           <a:bodyPr/>
           <a:lstStyle/>
           <a:p>
-            <a:r>
-              <a:rPr lang="en-US" dirty="0"/>
-              <a:t/>
-            </a:r>
             <a:endParaRPr lang="en-US" dirty="0"/>
           </a:p>
         </p:txBody>
@@ -1289,6 +1034,11 @@
 <file path=ppt/slideMasters/slideMaster1.xml><?xml version="1.0" encoding="utf-8"?>
 <p:sldMaster xmlns:a="http://schemas.openxmlformats.org/drawingml/2006/main" xmlns:r="http://schemas.openxmlformats.org/officeDocument/2006/relationships" xmlns:p="http://schemas.openxmlformats.org/presentationml/2006/main">
   <p:cSld>
+    <p:bg>
+      <p:bgRef idx="1001">
+        <a:schemeClr val="bg1"/>
+      </p:bgRef>
+    </p:bg>
     <p:spTree>
       <p:nvGrpSpPr>
         <p:cNvPr id="1" name=""/>
@@ -1571,6 +1321,7 @@
         <a:solidFill>
           <a:srgbClr val="FFFFFF"/>
         </a:solidFill>
+        <a:effectLst/>
       </p:bgPr>
     </p:bg>
     <p:spTree>
@@ -1648,7 +1399,7 @@
             <a:off x="5669280" y="274320"/>
             <a:ext cx="3840480" cy="3840480"/>
           </a:xfrm>
-          <a:prstGeom prst="oval">
+          <a:prstGeom prst="line">
             <a:avLst/>
           </a:prstGeom>
           <a:solidFill>
@@ -1687,7 +1438,7 @@
           <a:bodyPr wrap="square" lIns="0" tIns="0" rIns="0" bIns="0" rtlCol="0" anchor="ctr"/>
           <a:lstStyle/>
           <a:p>
-            <a:pPr algn="ctr" indent="0" marL="0">
+            <a:pPr marL="0" indent="0" algn="ctr">
               <a:buNone/>
             </a:pPr>
             <a:r>
@@ -1753,11 +1504,11 @@
           <a:bodyPr wrap="square" lIns="0" tIns="0" rIns="0" bIns="0" rtlCol="0" anchor="ctr"/>
           <a:lstStyle/>
           <a:p>
-            <a:pPr indent="0" marL="0">
-              <a:buNone/>
-            </a:pPr>
-            <a:r>
-              <a:rPr lang="en-US" sz="750" b="1" spc="100" kern="0" dirty="0">
+            <a:pPr marL="0" indent="0">
+              <a:buNone/>
+            </a:pPr>
+            <a:r>
+              <a:rPr lang="en-US" sz="750" b="1" kern="0" spc="100" dirty="0">
                 <a:solidFill>
                   <a:srgbClr val="0F3D6E"/>
                 </a:solidFill>
@@ -1792,7 +1543,7 @@
           <a:bodyPr wrap="square" lIns="0" tIns="0" rIns="0" bIns="0" rtlCol="0" anchor="ctr"/>
           <a:lstStyle/>
           <a:p>
-            <a:pPr indent="0" marL="0">
+            <a:pPr marL="0" indent="0">
               <a:lnSpc>
                 <a:spcPct val="110000"/>
               </a:lnSpc>
@@ -1812,7 +1563,7 @@
             <a:endParaRPr lang="en-US" sz="2800" dirty="0"/>
           </a:p>
           <a:p>
-            <a:pPr indent="0" marL="0">
+            <a:pPr marL="0" indent="0">
               <a:lnSpc>
                 <a:spcPct val="110000"/>
               </a:lnSpc>
@@ -1832,7 +1583,7 @@
             <a:endParaRPr lang="en-US" sz="2800" dirty="0"/>
           </a:p>
           <a:p>
-            <a:pPr indent="0" marL="0">
+            <a:pPr marL="0" indent="0">
               <a:lnSpc>
                 <a:spcPct val="110000"/>
               </a:lnSpc>
@@ -1874,7 +1625,7 @@
           <a:bodyPr wrap="square" lIns="0" tIns="0" rIns="0" bIns="0" rtlCol="0" anchor="ctr"/>
           <a:lstStyle/>
           <a:p>
-            <a:pPr indent="0" marL="0">
+            <a:pPr marL="0" indent="0">
               <a:buNone/>
             </a:pPr>
             <a:r>
@@ -1936,7 +1687,7 @@
           <a:bodyPr wrap="square" lIns="0" tIns="0" rIns="0" bIns="0" rtlCol="0" anchor="ctr"/>
           <a:lstStyle/>
           <a:p>
-            <a:pPr indent="0" marL="0">
+            <a:pPr marL="0" indent="0">
               <a:buNone/>
             </a:pPr>
             <a:r>
@@ -1975,7 +1726,7 @@
           <a:bodyPr wrap="square" lIns="0" tIns="0" rIns="0" bIns="0" rtlCol="0" anchor="ctr"/>
           <a:lstStyle/>
           <a:p>
-            <a:pPr indent="0" marL="0">
+            <a:pPr marL="0" indent="0">
               <a:buNone/>
             </a:pPr>
             <a:r>
@@ -2009,6 +1760,7 @@
         <a:solidFill>
           <a:srgbClr val="FFFFFF"/>
         </a:solidFill>
+        <a:effectLst/>
       </p:bgPr>
     </p:bg>
     <p:spTree>
@@ -2096,7 +1848,7 @@
           <a:bodyPr wrap="square" lIns="0" tIns="0" rIns="0" bIns="0" rtlCol="0" anchor="ctr"/>
           <a:lstStyle/>
           <a:p>
-            <a:pPr indent="0" marL="0">
+            <a:pPr marL="0" indent="0">
               <a:buNone/>
             </a:pPr>
             <a:r>
@@ -2138,7 +1890,7 @@
             <a:prstDash val="solid"/>
           </a:ln>
           <a:effectLst>
-            <a:outerShdw sx="100000" sy="100000" kx="0" ky="0" algn="bl" rotWithShape="0" blurRad="101600" dist="38100" dir="8100000">
+            <a:outerShdw blurRad="101600" dist="38100" dir="8100000" algn="bl" rotWithShape="0">
               <a:srgbClr val="9EAFC0">
                 <a:alpha val="13000"/>
               </a:srgbClr>
@@ -2192,7 +1944,7 @@
           <a:bodyPr wrap="square" lIns="0" tIns="0" rIns="0" bIns="0" rtlCol="0" anchor="ctr"/>
           <a:lstStyle/>
           <a:p>
-            <a:pPr indent="0" marL="0">
+            <a:pPr marL="0" indent="0">
               <a:buNone/>
             </a:pPr>
             <a:r>
@@ -2231,7 +1983,7 @@
           <a:bodyPr wrap="square" lIns="0" tIns="0" rIns="0" bIns="0" rtlCol="0" anchor="ctr"/>
           <a:lstStyle/>
           <a:p>
-            <a:pPr indent="0" marL="0">
+            <a:pPr marL="0" indent="0">
               <a:buNone/>
             </a:pPr>
             <a:r>
@@ -2270,7 +2022,7 @@
           <a:bodyPr wrap="square" lIns="0" tIns="0" rIns="0" bIns="0" rtlCol="0" anchor="ctr"/>
           <a:lstStyle/>
           <a:p>
-            <a:pPr indent="0" marL="0">
+            <a:pPr marL="0" indent="0">
               <a:buNone/>
             </a:pPr>
             <a:r>
@@ -2312,7 +2064,7 @@
             <a:prstDash val="solid"/>
           </a:ln>
           <a:effectLst>
-            <a:outerShdw sx="100000" sy="100000" kx="0" ky="0" algn="bl" rotWithShape="0" blurRad="101600" dist="38100" dir="8100000">
+            <a:outerShdw blurRad="101600" dist="38100" dir="8100000" algn="bl" rotWithShape="0">
               <a:srgbClr val="9EAFC0">
                 <a:alpha val="13000"/>
               </a:srgbClr>
@@ -2366,7 +2118,7 @@
           <a:bodyPr wrap="square" lIns="0" tIns="0" rIns="0" bIns="0" rtlCol="0" anchor="ctr"/>
           <a:lstStyle/>
           <a:p>
-            <a:pPr indent="0" marL="0">
+            <a:pPr marL="0" indent="0">
               <a:buNone/>
             </a:pPr>
             <a:r>
@@ -2405,7 +2157,7 @@
           <a:bodyPr wrap="square" lIns="0" tIns="0" rIns="0" bIns="0" rtlCol="0" anchor="ctr"/>
           <a:lstStyle/>
           <a:p>
-            <a:pPr indent="0" marL="0">
+            <a:pPr marL="0" indent="0">
               <a:buNone/>
             </a:pPr>
             <a:r>
@@ -2444,7 +2196,7 @@
           <a:bodyPr wrap="square" lIns="0" tIns="0" rIns="0" bIns="0" rtlCol="0" anchor="ctr"/>
           <a:lstStyle/>
           <a:p>
-            <a:pPr indent="0" marL="0">
+            <a:pPr marL="0" indent="0">
               <a:buNone/>
             </a:pPr>
             <a:r>
@@ -2486,7 +2238,7 @@
             <a:prstDash val="solid"/>
           </a:ln>
           <a:effectLst>
-            <a:outerShdw sx="100000" sy="100000" kx="0" ky="0" algn="bl" rotWithShape="0" blurRad="101600" dist="38100" dir="8100000">
+            <a:outerShdw blurRad="101600" dist="38100" dir="8100000" algn="bl" rotWithShape="0">
               <a:srgbClr val="9EAFC0">
                 <a:alpha val="13000"/>
               </a:srgbClr>
@@ -2540,7 +2292,7 @@
           <a:bodyPr wrap="square" lIns="0" tIns="0" rIns="0" bIns="0" rtlCol="0" anchor="ctr"/>
           <a:lstStyle/>
           <a:p>
-            <a:pPr indent="0" marL="0">
+            <a:pPr marL="0" indent="0">
               <a:buNone/>
             </a:pPr>
             <a:r>
@@ -2579,7 +2331,7 @@
           <a:bodyPr wrap="square" lIns="0" tIns="0" rIns="0" bIns="0" rtlCol="0" anchor="ctr"/>
           <a:lstStyle/>
           <a:p>
-            <a:pPr indent="0" marL="0">
+            <a:pPr marL="0" indent="0">
               <a:buNone/>
             </a:pPr>
             <a:r>
@@ -2618,7 +2370,7 @@
           <a:bodyPr wrap="square" lIns="0" tIns="0" rIns="0" bIns="0" rtlCol="0" anchor="ctr"/>
           <a:lstStyle/>
           <a:p>
-            <a:pPr indent="0" marL="0">
+            <a:pPr marL="0" indent="0">
               <a:buNone/>
             </a:pPr>
             <a:r>
@@ -2660,7 +2412,7 @@
             <a:prstDash val="solid"/>
           </a:ln>
           <a:effectLst>
-            <a:outerShdw sx="100000" sy="100000" kx="0" ky="0" algn="bl" rotWithShape="0" blurRad="101600" dist="38100" dir="8100000">
+            <a:outerShdw blurRad="101600" dist="38100" dir="8100000" algn="bl" rotWithShape="0">
               <a:srgbClr val="9EAFC0">
                 <a:alpha val="13000"/>
               </a:srgbClr>
@@ -2714,7 +2466,7 @@
           <a:bodyPr wrap="square" lIns="0" tIns="0" rIns="0" bIns="0" rtlCol="0" anchor="ctr"/>
           <a:lstStyle/>
           <a:p>
-            <a:pPr indent="0" marL="0">
+            <a:pPr marL="0" indent="0">
               <a:buNone/>
             </a:pPr>
             <a:r>
@@ -2753,7 +2505,7 @@
           <a:bodyPr wrap="square" lIns="0" tIns="0" rIns="0" bIns="0" rtlCol="0" anchor="ctr"/>
           <a:lstStyle/>
           <a:p>
-            <a:pPr indent="0" marL="0">
+            <a:pPr marL="0" indent="0">
               <a:buNone/>
             </a:pPr>
             <a:r>
@@ -2792,7 +2544,7 @@
           <a:bodyPr wrap="square" lIns="0" tIns="0" rIns="0" bIns="0" rtlCol="0" anchor="ctr"/>
           <a:lstStyle/>
           <a:p>
-            <a:pPr indent="0" marL="0">
+            <a:pPr marL="0" indent="0">
               <a:buNone/>
             </a:pPr>
             <a:r>
@@ -2831,7 +2583,7 @@
           <a:bodyPr wrap="square" lIns="0" tIns="0" rIns="0" bIns="0" rtlCol="0" anchor="ctr"/>
           <a:lstStyle/>
           <a:p>
-            <a:pPr indent="0" marL="0">
+            <a:pPr marL="0" indent="0">
               <a:buNone/>
             </a:pPr>
             <a:r>
@@ -2895,7 +2647,7 @@
           <a:bodyPr wrap="square" lIns="0" tIns="0" rIns="0" bIns="0" rtlCol="0" anchor="ctr"/>
           <a:lstStyle/>
           <a:p>
-            <a:pPr indent="0" marL="0">
+            <a:pPr marL="0" indent="0">
               <a:lnSpc>
                 <a:spcPct val="110000"/>
               </a:lnSpc>
@@ -2915,7 +2667,7 @@
             <a:endParaRPr lang="en-US" sz="1400" dirty="0"/>
           </a:p>
           <a:p>
-            <a:pPr indent="0" marL="0">
+            <a:pPr marL="0" indent="0">
               <a:lnSpc>
                 <a:spcPct val="110000"/>
               </a:lnSpc>
@@ -2957,7 +2709,7 @@
           <a:bodyPr wrap="square" lIns="0" tIns="0" rIns="0" bIns="0" rtlCol="0" anchor="ctr"/>
           <a:lstStyle/>
           <a:p>
-            <a:pPr indent="0" marL="0">
+            <a:pPr marL="0" indent="0">
               <a:lnSpc>
                 <a:spcPct val="130000"/>
               </a:lnSpc>
@@ -2977,7 +2729,7 @@
             <a:endParaRPr lang="en-US" sz="1000" dirty="0"/>
           </a:p>
           <a:p>
-            <a:pPr indent="0" marL="0">
+            <a:pPr marL="0" indent="0">
               <a:lnSpc>
                 <a:spcPct val="130000"/>
               </a:lnSpc>
@@ -2997,7 +2749,7 @@
             <a:endParaRPr lang="en-US" sz="1000" dirty="0"/>
           </a:p>
           <a:p>
-            <a:pPr indent="0" marL="0">
+            <a:pPr marL="0" indent="0">
               <a:lnSpc>
                 <a:spcPct val="130000"/>
               </a:lnSpc>
@@ -3064,7 +2816,7 @@
           <a:bodyPr wrap="square" lIns="0" tIns="0" rIns="0" bIns="0" rtlCol="0" anchor="ctr"/>
           <a:lstStyle/>
           <a:p>
-            <a:pPr indent="0" marL="0">
+            <a:pPr marL="0" indent="0">
               <a:buNone/>
             </a:pPr>
             <a:r>
@@ -3098,6 +2850,7 @@
         <a:solidFill>
           <a:srgbClr val="F7F9FC"/>
         </a:solidFill>
+        <a:effectLst/>
       </p:bgPr>
     </p:bg>
     <p:spTree>
@@ -3160,7 +2913,7 @@
           <a:bodyPr wrap="square" lIns="0" tIns="0" rIns="0" bIns="0" rtlCol="0" anchor="ctr"/>
           <a:lstStyle/>
           <a:p>
-            <a:pPr indent="0" marL="0">
+            <a:pPr marL="0" indent="0">
               <a:buNone/>
             </a:pPr>
             <a:r>
@@ -3199,7 +2952,7 @@
           <a:bodyPr wrap="square" lIns="0" tIns="0" rIns="0" bIns="0" rtlCol="0" anchor="ctr"/>
           <a:lstStyle/>
           <a:p>
-            <a:pPr indent="0" marL="0">
+            <a:pPr marL="0" indent="0">
               <a:buNone/>
             </a:pPr>
             <a:r>
@@ -3238,7 +2991,7 @@
           <a:bodyPr wrap="square" lIns="0" tIns="0" rIns="0" bIns="0" rtlCol="0" anchor="ctr"/>
           <a:lstStyle/>
           <a:p>
-            <a:pPr indent="0" marL="0">
+            <a:pPr marL="0" indent="0">
               <a:buNone/>
             </a:pPr>
             <a:r>
@@ -3280,7 +3033,7 @@
             <a:prstDash val="solid"/>
           </a:ln>
           <a:effectLst>
-            <a:outerShdw sx="100000" sy="100000" kx="0" ky="0" algn="bl" rotWithShape="0" blurRad="101600" dist="38100" dir="8100000">
+            <a:outerShdw blurRad="101600" dist="38100" dir="8100000" algn="bl" rotWithShape="0">
               <a:srgbClr val="9EAFC0">
                 <a:alpha val="13000"/>
               </a:srgbClr>
@@ -3334,7 +3087,7 @@
           <a:bodyPr wrap="square" lIns="0" tIns="0" rIns="0" bIns="0" rtlCol="0" anchor="ctr"/>
           <a:lstStyle/>
           <a:p>
-            <a:pPr indent="0" marL="0">
+            <a:pPr marL="0" indent="0">
               <a:buNone/>
             </a:pPr>
             <a:r>
@@ -3373,7 +3126,7 @@
           <a:bodyPr wrap="square" lIns="0" tIns="0" rIns="0" bIns="0" rtlCol="0" anchor="ctr"/>
           <a:lstStyle/>
           <a:p>
-            <a:pPr indent="0" marL="0">
+            <a:pPr marL="0" indent="0">
               <a:buNone/>
             </a:pPr>
             <a:r>
@@ -3437,7 +3190,7 @@
           <a:bodyPr wrap="square" lIns="0" tIns="0" rIns="0" bIns="0" rtlCol="0" anchor="ctr"/>
           <a:lstStyle/>
           <a:p>
-            <a:pPr indent="0" marL="0">
+            <a:pPr marL="0" indent="0">
               <a:buNone/>
             </a:pPr>
             <a:r>
@@ -3476,7 +3229,7 @@
           <a:bodyPr wrap="square" lIns="0" tIns="0" rIns="0" bIns="0" rtlCol="0" anchor="ctr"/>
           <a:lstStyle/>
           <a:p>
-            <a:pPr indent="0" marL="0">
+            <a:pPr marL="0" indent="0">
               <a:buNone/>
             </a:pPr>
             <a:r>
@@ -3518,7 +3271,7 @@
             <a:prstDash val="solid"/>
           </a:ln>
           <a:effectLst>
-            <a:outerShdw sx="100000" sy="100000" kx="0" ky="0" algn="bl" rotWithShape="0" blurRad="101600" dist="38100" dir="8100000">
+            <a:outerShdw blurRad="101600" dist="38100" dir="8100000" algn="bl" rotWithShape="0">
               <a:srgbClr val="9EAFC0">
                 <a:alpha val="13000"/>
               </a:srgbClr>
@@ -3572,7 +3325,7 @@
           <a:bodyPr wrap="square" lIns="0" tIns="0" rIns="0" bIns="0" rtlCol="0" anchor="ctr"/>
           <a:lstStyle/>
           <a:p>
-            <a:pPr indent="0" marL="0">
+            <a:pPr marL="0" indent="0">
               <a:buNone/>
             </a:pPr>
             <a:r>
@@ -3611,7 +3364,7 @@
           <a:bodyPr wrap="square" lIns="0" tIns="0" rIns="0" bIns="0" rtlCol="0" anchor="ctr"/>
           <a:lstStyle/>
           <a:p>
-            <a:pPr indent="0" marL="0">
+            <a:pPr marL="0" indent="0">
               <a:buNone/>
             </a:pPr>
             <a:r>
@@ -3675,7 +3428,7 @@
           <a:bodyPr wrap="square" lIns="0" tIns="0" rIns="0" bIns="0" rtlCol="0" anchor="ctr"/>
           <a:lstStyle/>
           <a:p>
-            <a:pPr indent="0" marL="0">
+            <a:pPr marL="0" indent="0">
               <a:buNone/>
             </a:pPr>
             <a:r>
@@ -3714,7 +3467,7 @@
           <a:bodyPr wrap="square" lIns="0" tIns="0" rIns="0" bIns="0" rtlCol="0" anchor="ctr"/>
           <a:lstStyle/>
           <a:p>
-            <a:pPr indent="0" marL="0">
+            <a:pPr marL="0" indent="0">
               <a:buNone/>
             </a:pPr>
             <a:r>
@@ -3756,7 +3509,7 @@
             <a:prstDash val="solid"/>
           </a:ln>
           <a:effectLst>
-            <a:outerShdw sx="100000" sy="100000" kx="0" ky="0" algn="bl" rotWithShape="0" blurRad="101600" dist="38100" dir="8100000">
+            <a:outerShdw blurRad="101600" dist="38100" dir="8100000" algn="bl" rotWithShape="0">
               <a:srgbClr val="9EAFC0">
                 <a:alpha val="13000"/>
               </a:srgbClr>
@@ -3810,7 +3563,7 @@
           <a:bodyPr wrap="square" lIns="0" tIns="0" rIns="0" bIns="0" rtlCol="0" anchor="ctr"/>
           <a:lstStyle/>
           <a:p>
-            <a:pPr indent="0" marL="0">
+            <a:pPr marL="0" indent="0">
               <a:buNone/>
             </a:pPr>
             <a:r>
@@ -3849,7 +3602,7 @@
           <a:bodyPr wrap="square" lIns="0" tIns="0" rIns="0" bIns="0" rtlCol="0" anchor="ctr"/>
           <a:lstStyle/>
           <a:p>
-            <a:pPr indent="0" marL="0">
+            <a:pPr marL="0" indent="0">
               <a:buNone/>
             </a:pPr>
             <a:r>
@@ -3913,7 +3666,7 @@
           <a:bodyPr wrap="square" lIns="0" tIns="0" rIns="0" bIns="0" rtlCol="0" anchor="ctr"/>
           <a:lstStyle/>
           <a:p>
-            <a:pPr indent="0" marL="0">
+            <a:pPr marL="0" indent="0">
               <a:buNone/>
             </a:pPr>
             <a:r>
@@ -3952,7 +3705,7 @@
           <a:bodyPr wrap="square" lIns="0" tIns="0" rIns="0" bIns="0" rtlCol="0" anchor="ctr"/>
           <a:lstStyle/>
           <a:p>
-            <a:pPr indent="0" marL="0">
+            <a:pPr marL="0" indent="0">
               <a:buNone/>
             </a:pPr>
             <a:r>
@@ -3994,7 +3747,7 @@
             <a:prstDash val="solid"/>
           </a:ln>
           <a:effectLst>
-            <a:outerShdw sx="100000" sy="100000" kx="0" ky="0" algn="bl" rotWithShape="0" blurRad="101600" dist="38100" dir="8100000">
+            <a:outerShdw blurRad="101600" dist="38100" dir="8100000" algn="bl" rotWithShape="0">
               <a:srgbClr val="9EAFC0">
                 <a:alpha val="13000"/>
               </a:srgbClr>
@@ -4048,7 +3801,7 @@
           <a:bodyPr wrap="square" lIns="0" tIns="0" rIns="0" bIns="0" rtlCol="0" anchor="ctr"/>
           <a:lstStyle/>
           <a:p>
-            <a:pPr indent="0" marL="0">
+            <a:pPr marL="0" indent="0">
               <a:buNone/>
             </a:pPr>
             <a:r>
@@ -4087,7 +3840,7 @@
           <a:bodyPr wrap="square" lIns="0" tIns="0" rIns="0" bIns="0" rtlCol="0" anchor="ctr"/>
           <a:lstStyle/>
           <a:p>
-            <a:pPr indent="0" marL="0">
+            <a:pPr marL="0" indent="0">
               <a:buNone/>
             </a:pPr>
             <a:r>
@@ -4151,7 +3904,7 @@
           <a:bodyPr wrap="square" lIns="0" tIns="0" rIns="0" bIns="0" rtlCol="0" anchor="ctr"/>
           <a:lstStyle/>
           <a:p>
-            <a:pPr indent="0" marL="0">
+            <a:pPr marL="0" indent="0">
               <a:buNone/>
             </a:pPr>
             <a:r>
@@ -4190,7 +3943,7 @@
           <a:bodyPr wrap="square" lIns="0" tIns="0" rIns="0" bIns="0" rtlCol="0" anchor="ctr"/>
           <a:lstStyle/>
           <a:p>
-            <a:pPr indent="0" marL="0">
+            <a:pPr marL="0" indent="0">
               <a:buNone/>
             </a:pPr>
             <a:r>
@@ -4232,7 +3985,7 @@
             <a:prstDash val="solid"/>
           </a:ln>
           <a:effectLst>
-            <a:outerShdw sx="100000" sy="100000" kx="0" ky="0" algn="bl" rotWithShape="0" blurRad="101600" dist="38100" dir="8100000">
+            <a:outerShdw blurRad="101600" dist="38100" dir="8100000" algn="bl" rotWithShape="0">
               <a:srgbClr val="9EAFC0">
                 <a:alpha val="13000"/>
               </a:srgbClr>
@@ -4286,7 +4039,7 @@
           <a:bodyPr wrap="square" lIns="0" tIns="0" rIns="0" bIns="0" rtlCol="0" anchor="ctr"/>
           <a:lstStyle/>
           <a:p>
-            <a:pPr indent="0" marL="0">
+            <a:pPr marL="0" indent="0">
               <a:buNone/>
             </a:pPr>
             <a:r>
@@ -4325,7 +4078,7 @@
           <a:bodyPr wrap="square" lIns="0" tIns="0" rIns="0" bIns="0" rtlCol="0" anchor="ctr"/>
           <a:lstStyle/>
           <a:p>
-            <a:pPr indent="0" marL="0">
+            <a:pPr marL="0" indent="0">
               <a:buNone/>
             </a:pPr>
             <a:r>
@@ -4389,7 +4142,7 @@
           <a:bodyPr wrap="square" lIns="0" tIns="0" rIns="0" bIns="0" rtlCol="0" anchor="ctr"/>
           <a:lstStyle/>
           <a:p>
-            <a:pPr indent="0" marL="0">
+            <a:pPr marL="0" indent="0">
               <a:buNone/>
             </a:pPr>
             <a:r>
@@ -4428,7 +4181,7 @@
           <a:bodyPr wrap="square" lIns="0" tIns="0" rIns="0" bIns="0" rtlCol="0" anchor="ctr"/>
           <a:lstStyle/>
           <a:p>
-            <a:pPr indent="0" marL="0">
+            <a:pPr marL="0" indent="0">
               <a:buNone/>
             </a:pPr>
             <a:r>
@@ -4492,7 +4245,7 @@
           <a:bodyPr wrap="square" lIns="0" tIns="0" rIns="0" bIns="0" rtlCol="0" anchor="ctr"/>
           <a:lstStyle/>
           <a:p>
-            <a:pPr indent="0" marL="0">
+            <a:pPr marL="0" indent="0">
               <a:buNone/>
             </a:pPr>
             <a:r>
@@ -4526,6 +4279,7 @@
         <a:solidFill>
           <a:srgbClr val="FFFFFF"/>
         </a:solidFill>
+        <a:effectLst/>
       </p:bgPr>
     </p:bg>
     <p:spTree>
@@ -4613,7 +4367,7 @@
           <a:bodyPr wrap="square" lIns="0" tIns="0" rIns="0" bIns="0" rtlCol="0" anchor="ctr"/>
           <a:lstStyle/>
           <a:p>
-            <a:pPr indent="0" marL="0">
+            <a:pPr marL="0" indent="0">
               <a:buNone/>
             </a:pPr>
             <a:r>
@@ -4652,7 +4406,7 @@
           <a:bodyPr wrap="square" lIns="0" tIns="0" rIns="0" bIns="0" rtlCol="0" anchor="ctr"/>
           <a:lstStyle/>
           <a:p>
-            <a:pPr indent="0" marL="0">
+            <a:pPr marL="0" indent="0">
               <a:buNone/>
             </a:pPr>
             <a:r>
@@ -4691,7 +4445,7 @@
           <a:bodyPr wrap="square" lIns="0" tIns="0" rIns="0" bIns="0" rtlCol="0" anchor="ctr"/>
           <a:lstStyle/>
           <a:p>
-            <a:pPr indent="0" marL="0">
+            <a:pPr marL="0" indent="0">
               <a:buNone/>
             </a:pPr>
             <a:r>
@@ -4733,7 +4487,7 @@
             <a:prstDash val="solid"/>
           </a:ln>
           <a:effectLst>
-            <a:outerShdw sx="100000" sy="100000" kx="0" ky="0" algn="bl" rotWithShape="0" blurRad="101600" dist="38100" dir="8100000">
+            <a:outerShdw blurRad="101600" dist="38100" dir="8100000" algn="bl" rotWithShape="0">
               <a:srgbClr val="9EAFC0">
                 <a:alpha val="13000"/>
               </a:srgbClr>
@@ -4787,7 +4541,7 @@
           <a:bodyPr wrap="square" lIns="0" tIns="0" rIns="0" bIns="0" rtlCol="0" anchor="ctr"/>
           <a:lstStyle/>
           <a:p>
-            <a:pPr indent="0" marL="0">
+            <a:pPr marL="0" indent="0">
               <a:buNone/>
             </a:pPr>
             <a:r>
@@ -4851,7 +4605,7 @@
           <a:bodyPr wrap="square" lIns="0" tIns="0" rIns="0" bIns="0" rtlCol="0" anchor="ctr"/>
           <a:lstStyle/>
           <a:p>
-            <a:pPr indent="0" marL="0">
+            <a:pPr marL="0" indent="0">
               <a:buNone/>
             </a:pPr>
             <a:r>
@@ -4890,7 +4644,7 @@
           <a:bodyPr wrap="square" lIns="0" tIns="0" rIns="0" bIns="0" rtlCol="0" anchor="ctr"/>
           <a:lstStyle/>
           <a:p>
-            <a:pPr indent="0" marL="0">
+            <a:pPr marL="0" indent="0">
               <a:buNone/>
             </a:pPr>
             <a:r>
@@ -4954,7 +4708,7 @@
           <a:bodyPr wrap="square" lIns="0" tIns="0" rIns="0" bIns="0" rtlCol="0" anchor="ctr"/>
           <a:lstStyle/>
           <a:p>
-            <a:pPr indent="0" marL="0">
+            <a:pPr marL="0" indent="0">
               <a:buNone/>
             </a:pPr>
             <a:r>
@@ -4993,7 +4747,7 @@
           <a:bodyPr wrap="square" lIns="0" tIns="0" rIns="0" bIns="0" rtlCol="0" anchor="ctr"/>
           <a:lstStyle/>
           <a:p>
-            <a:pPr indent="0" marL="0">
+            <a:pPr marL="0" indent="0">
               <a:buNone/>
             </a:pPr>
             <a:r>
@@ -5057,7 +4811,7 @@
           <a:bodyPr wrap="square" lIns="0" tIns="0" rIns="0" bIns="0" rtlCol="0" anchor="ctr"/>
           <a:lstStyle/>
           <a:p>
-            <a:pPr indent="0" marL="0">
+            <a:pPr marL="0" indent="0">
               <a:buNone/>
             </a:pPr>
             <a:r>
@@ -5096,7 +4850,7 @@
           <a:bodyPr wrap="square" lIns="0" tIns="0" rIns="0" bIns="0" rtlCol="0" anchor="ctr"/>
           <a:lstStyle/>
           <a:p>
-            <a:pPr indent="0" marL="0">
+            <a:pPr marL="0" indent="0">
               <a:buNone/>
             </a:pPr>
             <a:r>
@@ -5160,7 +4914,7 @@
           <a:bodyPr wrap="square" lIns="0" tIns="0" rIns="0" bIns="0" rtlCol="0" anchor="ctr"/>
           <a:lstStyle/>
           <a:p>
-            <a:pPr indent="0" marL="0">
+            <a:pPr marL="0" indent="0">
               <a:buNone/>
             </a:pPr>
             <a:r>
@@ -5199,7 +4953,7 @@
           <a:bodyPr wrap="square" lIns="0" tIns="0" rIns="0" bIns="0" rtlCol="0" anchor="ctr"/>
           <a:lstStyle/>
           <a:p>
-            <a:pPr indent="0" marL="0">
+            <a:pPr marL="0" indent="0">
               <a:buNone/>
             </a:pPr>
             <a:r>
@@ -5263,7 +5017,7 @@
           <a:bodyPr wrap="square" lIns="0" tIns="0" rIns="0" bIns="0" rtlCol="0" anchor="ctr"/>
           <a:lstStyle/>
           <a:p>
-            <a:pPr indent="0" marL="0">
+            <a:pPr marL="0" indent="0">
               <a:buNone/>
             </a:pPr>
             <a:r>
@@ -5302,7 +5056,7 @@
           <a:bodyPr wrap="square" lIns="0" tIns="0" rIns="0" bIns="0" rtlCol="0" anchor="ctr"/>
           <a:lstStyle/>
           <a:p>
-            <a:pPr indent="0" marL="0">
+            <a:pPr marL="0" indent="0">
               <a:buNone/>
             </a:pPr>
             <a:r>
@@ -5344,7 +5098,7 @@
             <a:prstDash val="solid"/>
           </a:ln>
           <a:effectLst>
-            <a:outerShdw sx="100000" sy="100000" kx="0" ky="0" algn="bl" rotWithShape="0" blurRad="101600" dist="38100" dir="8100000">
+            <a:outerShdw blurRad="101600" dist="38100" dir="8100000" algn="bl" rotWithShape="0">
               <a:srgbClr val="9EAFC0">
                 <a:alpha val="13000"/>
               </a:srgbClr>
@@ -5398,7 +5152,7 @@
           <a:bodyPr wrap="square" lIns="0" tIns="0" rIns="0" bIns="0" rtlCol="0" anchor="ctr"/>
           <a:lstStyle/>
           <a:p>
-            <a:pPr indent="0" marL="0">
+            <a:pPr marL="0" indent="0">
               <a:buNone/>
             </a:pPr>
             <a:r>
@@ -5437,7 +5191,7 @@
           <a:bodyPr wrap="square" lIns="0" tIns="0" rIns="0" bIns="0" rtlCol="0" anchor="ctr"/>
           <a:lstStyle/>
           <a:p>
-            <a:pPr indent="0" marL="0">
+            <a:pPr marL="0" indent="0">
               <a:buNone/>
             </a:pPr>
             <a:r>
@@ -5454,7 +5208,7 @@
             <a:endParaRPr lang="en-US" sz="1000" dirty="0"/>
           </a:p>
           <a:p>
-            <a:pPr indent="0" marL="0">
+            <a:pPr marL="0" indent="0">
               <a:buNone/>
             </a:pPr>
             <a:r>
@@ -5471,7 +5225,7 @@
             <a:endParaRPr lang="en-US" sz="1000" dirty="0"/>
           </a:p>
           <a:p>
-            <a:pPr indent="0" marL="0">
+            <a:pPr marL="0" indent="0">
               <a:buNone/>
             </a:pPr>
             <a:r>
@@ -5488,7 +5242,7 @@
             <a:endParaRPr lang="en-US" sz="1000" dirty="0"/>
           </a:p>
           <a:p>
-            <a:pPr indent="0" marL="0">
+            <a:pPr marL="0" indent="0">
               <a:buNone/>
             </a:pPr>
             <a:r>
@@ -5552,7 +5306,7 @@
           <a:bodyPr wrap="square" lIns="0" tIns="0" rIns="0" bIns="0" rtlCol="0" anchor="ctr"/>
           <a:lstStyle/>
           <a:p>
-            <a:pPr indent="0" marL="0">
+            <a:pPr marL="0" indent="0">
               <a:buNone/>
             </a:pPr>
             <a:r>
@@ -5591,7 +5345,7 @@
           <a:bodyPr wrap="square" lIns="0" tIns="0" rIns="0" bIns="0" rtlCol="0" anchor="ctr"/>
           <a:lstStyle/>
           <a:p>
-            <a:pPr indent="0" marL="0">
+            <a:pPr marL="0" indent="0">
               <a:buNone/>
             </a:pPr>
             <a:r>
@@ -5630,7 +5384,7 @@
           <a:bodyPr wrap="square" lIns="0" tIns="0" rIns="0" bIns="0" rtlCol="0" anchor="ctr"/>
           <a:lstStyle/>
           <a:p>
-            <a:pPr indent="0" marL="0">
+            <a:pPr marL="0" indent="0">
               <a:buNone/>
             </a:pPr>
             <a:r>
@@ -5669,7 +5423,7 @@
           <a:bodyPr wrap="square" lIns="0" tIns="0" rIns="0" bIns="0" rtlCol="0" anchor="ctr"/>
           <a:lstStyle/>
           <a:p>
-            <a:pPr indent="0" marL="0">
+            <a:pPr marL="0" indent="0">
               <a:buNone/>
             </a:pPr>
             <a:r>
@@ -5708,7 +5462,7 @@
           <a:bodyPr wrap="square" lIns="0" tIns="0" rIns="0" bIns="0" rtlCol="0" anchor="ctr"/>
           <a:lstStyle/>
           <a:p>
-            <a:pPr indent="0" marL="0">
+            <a:pPr marL="0" indent="0">
               <a:buNone/>
             </a:pPr>
             <a:r>
@@ -5772,7 +5526,7 @@
           <a:bodyPr wrap="square" lIns="0" tIns="0" rIns="0" bIns="0" rtlCol="0" anchor="ctr"/>
           <a:lstStyle/>
           <a:p>
-            <a:pPr indent="0" marL="0">
+            <a:pPr marL="0" indent="0">
               <a:buNone/>
             </a:pPr>
             <a:r>
@@ -5806,6 +5560,7 @@
         <a:solidFill>
           <a:srgbClr val="F7F9FC"/>
         </a:solidFill>
+        <a:effectLst/>
       </p:bgPr>
     </p:bg>
     <p:spTree>
@@ -5868,7 +5623,7 @@
           <a:bodyPr wrap="square" lIns="0" tIns="0" rIns="0" bIns="0" rtlCol="0" anchor="ctr"/>
           <a:lstStyle/>
           <a:p>
-            <a:pPr indent="0" marL="0">
+            <a:pPr marL="0" indent="0">
               <a:buNone/>
             </a:pPr>
             <a:r>
@@ -5907,7 +5662,7 @@
           <a:bodyPr wrap="square" lIns="0" tIns="0" rIns="0" bIns="0" rtlCol="0" anchor="ctr"/>
           <a:lstStyle/>
           <a:p>
-            <a:pPr indent="0" marL="0">
+            <a:pPr marL="0" indent="0">
               <a:buNone/>
             </a:pPr>
             <a:r>
@@ -5946,7 +5701,7 @@
           <a:bodyPr wrap="square" lIns="0" tIns="0" rIns="0" bIns="0" rtlCol="0" anchor="ctr"/>
           <a:lstStyle/>
           <a:p>
-            <a:pPr indent="0" marL="0">
+            <a:pPr marL="0" indent="0">
               <a:buNone/>
             </a:pPr>
             <a:r>
@@ -5988,7 +5743,7 @@
             <a:prstDash val="solid"/>
           </a:ln>
           <a:effectLst>
-            <a:outerShdw sx="100000" sy="100000" kx="0" ky="0" algn="bl" rotWithShape="0" blurRad="101600" dist="38100" dir="8100000">
+            <a:outerShdw blurRad="101600" dist="38100" dir="8100000" algn="bl" rotWithShape="0">
               <a:srgbClr val="9EAFC0">
                 <a:alpha val="13000"/>
               </a:srgbClr>
@@ -6042,7 +5797,7 @@
           <a:bodyPr wrap="square" lIns="0" tIns="0" rIns="0" bIns="0" rtlCol="0" anchor="ctr"/>
           <a:lstStyle/>
           <a:p>
-            <a:pPr indent="0" marL="0">
+            <a:pPr marL="0" indent="0">
               <a:buNone/>
             </a:pPr>
             <a:r>
@@ -6106,7 +5861,7 @@
           <a:bodyPr wrap="square" lIns="0" tIns="0" rIns="0" bIns="0" rtlCol="0" anchor="ctr"/>
           <a:lstStyle/>
           <a:p>
-            <a:pPr indent="0" marL="0">
+            <a:pPr marL="0" indent="0">
               <a:buNone/>
             </a:pPr>
             <a:r>
@@ -6170,7 +5925,7 @@
           <a:bodyPr wrap="square" lIns="0" tIns="0" rIns="0" bIns="0" rtlCol="0" anchor="ctr"/>
           <a:lstStyle/>
           <a:p>
-            <a:pPr indent="0" marL="0">
+            <a:pPr marL="0" indent="0">
               <a:buNone/>
             </a:pPr>
             <a:r>
@@ -6209,7 +5964,7 @@
           <a:bodyPr wrap="square" lIns="0" tIns="0" rIns="0" bIns="0" rtlCol="0" anchor="ctr"/>
           <a:lstStyle/>
           <a:p>
-            <a:pPr indent="0" marL="0">
+            <a:pPr marL="0" indent="0">
               <a:buNone/>
             </a:pPr>
             <a:r>
@@ -6273,7 +6028,7 @@
           <a:bodyPr wrap="square" lIns="0" tIns="0" rIns="0" bIns="0" rtlCol="0" anchor="ctr"/>
           <a:lstStyle/>
           <a:p>
-            <a:pPr indent="0" marL="0">
+            <a:pPr marL="0" indent="0">
               <a:buNone/>
             </a:pPr>
             <a:r>
@@ -6312,7 +6067,7 @@
           <a:bodyPr wrap="square" lIns="0" tIns="0" rIns="0" bIns="0" rtlCol="0" anchor="ctr"/>
           <a:lstStyle/>
           <a:p>
-            <a:pPr indent="0" marL="0">
+            <a:pPr marL="0" indent="0">
               <a:buNone/>
             </a:pPr>
             <a:r>
@@ -6376,7 +6131,7 @@
           <a:bodyPr wrap="square" lIns="0" tIns="0" rIns="0" bIns="0" rtlCol="0" anchor="ctr"/>
           <a:lstStyle/>
           <a:p>
-            <a:pPr indent="0" marL="0">
+            <a:pPr marL="0" indent="0">
               <a:buNone/>
             </a:pPr>
             <a:r>
@@ -6415,7 +6170,7 @@
           <a:bodyPr wrap="square" lIns="0" tIns="0" rIns="0" bIns="0" rtlCol="0" anchor="ctr"/>
           <a:lstStyle/>
           <a:p>
-            <a:pPr indent="0" marL="0">
+            <a:pPr marL="0" indent="0">
               <a:buNone/>
             </a:pPr>
             <a:r>
@@ -6479,7 +6234,7 @@
           <a:bodyPr wrap="square" lIns="0" tIns="0" rIns="0" bIns="0" rtlCol="0" anchor="ctr"/>
           <a:lstStyle/>
           <a:p>
-            <a:pPr indent="0" marL="0">
+            <a:pPr marL="0" indent="0">
               <a:buNone/>
             </a:pPr>
             <a:r>
@@ -6518,7 +6273,7 @@
           <a:bodyPr wrap="square" lIns="0" tIns="0" rIns="0" bIns="0" rtlCol="0" anchor="ctr"/>
           <a:lstStyle/>
           <a:p>
-            <a:pPr indent="0" marL="0">
+            <a:pPr marL="0" indent="0">
               <a:buNone/>
             </a:pPr>
             <a:r>
@@ -6560,7 +6315,7 @@
             <a:prstDash val="solid"/>
           </a:ln>
           <a:effectLst>
-            <a:outerShdw sx="100000" sy="100000" kx="0" ky="0" algn="bl" rotWithShape="0" blurRad="101600" dist="38100" dir="8100000">
+            <a:outerShdw blurRad="101600" dist="38100" dir="8100000" algn="bl" rotWithShape="0">
               <a:srgbClr val="9EAFC0">
                 <a:alpha val="13000"/>
               </a:srgbClr>
@@ -6614,7 +6369,7 @@
           <a:bodyPr wrap="square" lIns="0" tIns="0" rIns="0" bIns="0" rtlCol="0" anchor="ctr"/>
           <a:lstStyle/>
           <a:p>
-            <a:pPr indent="0" marL="0">
+            <a:pPr marL="0" indent="0">
               <a:buNone/>
             </a:pPr>
             <a:r>
@@ -6678,7 +6433,7 @@
           <a:bodyPr wrap="square" lIns="0" tIns="0" rIns="0" bIns="0" rtlCol="0" anchor="ctr"/>
           <a:lstStyle/>
           <a:p>
-            <a:pPr indent="0" marL="0">
+            <a:pPr marL="0" indent="0">
               <a:buNone/>
             </a:pPr>
             <a:r>
@@ -6717,7 +6472,7 @@
           <a:bodyPr wrap="square" lIns="0" tIns="0" rIns="0" bIns="0" rtlCol="0" anchor="ctr"/>
           <a:lstStyle/>
           <a:p>
-            <a:pPr indent="0" marL="0">
+            <a:pPr marL="0" indent="0">
               <a:buNone/>
             </a:pPr>
             <a:r>
@@ -6756,7 +6511,7 @@
           <a:bodyPr wrap="square" lIns="0" tIns="0" rIns="0" bIns="0" rtlCol="0" anchor="ctr"/>
           <a:lstStyle/>
           <a:p>
-            <a:pPr indent="0" marL="0">
+            <a:pPr marL="0" indent="0">
               <a:buNone/>
             </a:pPr>
             <a:r>
@@ -6820,7 +6575,7 @@
           <a:bodyPr wrap="square" lIns="0" tIns="0" rIns="0" bIns="0" rtlCol="0" anchor="ctr"/>
           <a:lstStyle/>
           <a:p>
-            <a:pPr indent="0" marL="0">
+            <a:pPr marL="0" indent="0">
               <a:buNone/>
             </a:pPr>
             <a:r>
@@ -6859,7 +6614,7 @@
           <a:bodyPr wrap="square" lIns="0" tIns="0" rIns="0" bIns="0" rtlCol="0" anchor="ctr"/>
           <a:lstStyle/>
           <a:p>
-            <a:pPr indent="0" marL="0">
+            <a:pPr marL="0" indent="0">
               <a:buNone/>
             </a:pPr>
             <a:r>
@@ -6898,7 +6653,7 @@
           <a:bodyPr wrap="square" lIns="0" tIns="0" rIns="0" bIns="0" rtlCol="0" anchor="ctr"/>
           <a:lstStyle/>
           <a:p>
-            <a:pPr indent="0" marL="0">
+            <a:pPr marL="0" indent="0">
               <a:buNone/>
             </a:pPr>
             <a:r>
@@ -6962,7 +6717,7 @@
           <a:bodyPr wrap="square" lIns="0" tIns="0" rIns="0" bIns="0" rtlCol="0" anchor="ctr"/>
           <a:lstStyle/>
           <a:p>
-            <a:pPr indent="0" marL="0">
+            <a:pPr marL="0" indent="0">
               <a:buNone/>
             </a:pPr>
             <a:r>
@@ -7001,7 +6756,7 @@
           <a:bodyPr wrap="square" lIns="0" tIns="0" rIns="0" bIns="0" rtlCol="0" anchor="ctr"/>
           <a:lstStyle/>
           <a:p>
-            <a:pPr indent="0" marL="0">
+            <a:pPr marL="0" indent="0">
               <a:buNone/>
             </a:pPr>
             <a:r>
@@ -7040,7 +6795,7 @@
           <a:bodyPr wrap="square" lIns="0" tIns="0" rIns="0" bIns="0" rtlCol="0" anchor="ctr"/>
           <a:lstStyle/>
           <a:p>
-            <a:pPr indent="0" marL="0">
+            <a:pPr marL="0" indent="0">
               <a:buNone/>
             </a:pPr>
             <a:r>
@@ -7104,7 +6859,7 @@
           <a:bodyPr wrap="square" lIns="0" tIns="0" rIns="0" bIns="0" rtlCol="0" anchor="ctr"/>
           <a:lstStyle/>
           <a:p>
-            <a:pPr indent="0" marL="0">
+            <a:pPr marL="0" indent="0">
               <a:buNone/>
             </a:pPr>
             <a:r>
@@ -7143,7 +6898,7 @@
           <a:bodyPr wrap="square" lIns="0" tIns="0" rIns="0" bIns="0" rtlCol="0" anchor="ctr"/>
           <a:lstStyle/>
           <a:p>
-            <a:pPr indent="0" marL="0">
+            <a:pPr marL="0" indent="0">
               <a:lnSpc>
                 <a:spcPct val="130000"/>
               </a:lnSpc>
@@ -7163,7 +6918,7 @@
             <a:endParaRPr lang="en-US" sz="950" dirty="0"/>
           </a:p>
           <a:p>
-            <a:pPr indent="0" marL="0">
+            <a:pPr marL="0" indent="0">
               <a:lnSpc>
                 <a:spcPct val="130000"/>
               </a:lnSpc>
@@ -7230,7 +6985,7 @@
           <a:bodyPr wrap="square" lIns="0" tIns="0" rIns="0" bIns="0" rtlCol="0" anchor="ctr"/>
           <a:lstStyle/>
           <a:p>
-            <a:pPr indent="0" marL="0">
+            <a:pPr marL="0" indent="0">
               <a:buNone/>
             </a:pPr>
             <a:r>
@@ -7264,6 +7019,7 @@
         <a:solidFill>
           <a:srgbClr val="FFFFFF"/>
         </a:solidFill>
+        <a:effectLst/>
       </p:bgPr>
     </p:bg>
     <p:spTree>
@@ -7351,7 +7107,7 @@
           <a:bodyPr wrap="square" lIns="0" tIns="0" rIns="0" bIns="0" rtlCol="0" anchor="ctr"/>
           <a:lstStyle/>
           <a:p>
-            <a:pPr indent="0" marL="0">
+            <a:pPr marL="0" indent="0">
               <a:buNone/>
             </a:pPr>
             <a:r>
@@ -7390,7 +7146,7 @@
           <a:bodyPr wrap="square" lIns="0" tIns="0" rIns="0" bIns="0" rtlCol="0" anchor="ctr"/>
           <a:lstStyle/>
           <a:p>
-            <a:pPr indent="0" marL="0">
+            <a:pPr marL="0" indent="0">
               <a:buNone/>
             </a:pPr>
             <a:r>
@@ -7429,7 +7185,7 @@
           <a:bodyPr wrap="square" lIns="0" tIns="0" rIns="0" bIns="0" rtlCol="0" anchor="ctr"/>
           <a:lstStyle/>
           <a:p>
-            <a:pPr indent="0" marL="0">
+            <a:pPr marL="0" indent="0">
               <a:buNone/>
             </a:pPr>
             <a:r>
@@ -7493,7 +7249,7 @@
           <a:bodyPr wrap="square" lIns="0" tIns="0" rIns="0" bIns="0" rtlCol="0" anchor="ctr"/>
           <a:lstStyle/>
           <a:p>
-            <a:pPr indent="0" marL="0">
+            <a:pPr marL="0" indent="0">
               <a:buNone/>
             </a:pPr>
             <a:r>
@@ -7535,7 +7291,7 @@
             <a:prstDash val="solid"/>
           </a:ln>
           <a:effectLst>
-            <a:outerShdw sx="100000" sy="100000" kx="0" ky="0" algn="bl" rotWithShape="0" blurRad="101600" dist="38100" dir="8100000">
+            <a:outerShdw blurRad="101600" dist="38100" dir="8100000" algn="bl" rotWithShape="0">
               <a:srgbClr val="9EAFC0">
                 <a:alpha val="13000"/>
               </a:srgbClr>
@@ -7589,7 +7345,7 @@
           <a:bodyPr wrap="square" lIns="0" tIns="0" rIns="0" bIns="0" rtlCol="0" anchor="ctr"/>
           <a:lstStyle/>
           <a:p>
-            <a:pPr indent="0" marL="0">
+            <a:pPr marL="0" indent="0">
               <a:buNone/>
             </a:pPr>
             <a:r>
@@ -7628,7 +7384,7 @@
           <a:bodyPr wrap="square" lIns="0" tIns="0" rIns="0" bIns="0" rtlCol="0" anchor="ctr"/>
           <a:lstStyle/>
           <a:p>
-            <a:pPr indent="0" marL="0">
+            <a:pPr marL="0" indent="0">
               <a:buNone/>
             </a:pPr>
             <a:r>
@@ -7667,7 +7423,7 @@
           <a:bodyPr wrap="square" lIns="0" tIns="0" rIns="0" bIns="0" rtlCol="0" anchor="ctr"/>
           <a:lstStyle/>
           <a:p>
-            <a:pPr indent="0" marL="0">
+            <a:pPr marL="0" indent="0">
               <a:buNone/>
             </a:pPr>
             <a:r>
@@ -7729,7 +7485,7 @@
           <a:bodyPr wrap="square" lIns="0" tIns="0" rIns="0" bIns="0" rtlCol="0" anchor="ctr"/>
           <a:lstStyle/>
           <a:p>
-            <a:pPr indent="0" marL="0">
+            <a:pPr marL="0" indent="0">
               <a:lnSpc>
                 <a:spcPct val="120000"/>
               </a:lnSpc>
@@ -7774,7 +7530,7 @@
             <a:prstDash val="solid"/>
           </a:ln>
           <a:effectLst>
-            <a:outerShdw sx="100000" sy="100000" kx="0" ky="0" algn="bl" rotWithShape="0" blurRad="101600" dist="38100" dir="8100000">
+            <a:outerShdw blurRad="101600" dist="38100" dir="8100000" algn="bl" rotWithShape="0">
               <a:srgbClr val="9EAFC0">
                 <a:alpha val="13000"/>
               </a:srgbClr>
@@ -7828,7 +7584,7 @@
           <a:bodyPr wrap="square" lIns="0" tIns="0" rIns="0" bIns="0" rtlCol="0" anchor="ctr"/>
           <a:lstStyle/>
           <a:p>
-            <a:pPr indent="0" marL="0">
+            <a:pPr marL="0" indent="0">
               <a:buNone/>
             </a:pPr>
             <a:r>
@@ -7867,7 +7623,7 @@
           <a:bodyPr wrap="square" lIns="0" tIns="0" rIns="0" bIns="0" rtlCol="0" anchor="ctr"/>
           <a:lstStyle/>
           <a:p>
-            <a:pPr indent="0" marL="0">
+            <a:pPr marL="0" indent="0">
               <a:buNone/>
             </a:pPr>
             <a:r>
@@ -7906,7 +7662,7 @@
           <a:bodyPr wrap="square" lIns="0" tIns="0" rIns="0" bIns="0" rtlCol="0" anchor="ctr"/>
           <a:lstStyle/>
           <a:p>
-            <a:pPr indent="0" marL="0">
+            <a:pPr marL="0" indent="0">
               <a:buNone/>
             </a:pPr>
             <a:r>
@@ -7968,7 +7724,7 @@
           <a:bodyPr wrap="square" lIns="0" tIns="0" rIns="0" bIns="0" rtlCol="0" anchor="ctr"/>
           <a:lstStyle/>
           <a:p>
-            <a:pPr indent="0" marL="0">
+            <a:pPr marL="0" indent="0">
               <a:lnSpc>
                 <a:spcPct val="120000"/>
               </a:lnSpc>
@@ -8013,7 +7769,7 @@
             <a:prstDash val="solid"/>
           </a:ln>
           <a:effectLst>
-            <a:outerShdw sx="100000" sy="100000" kx="0" ky="0" algn="bl" rotWithShape="0" blurRad="101600" dist="38100" dir="8100000">
+            <a:outerShdw blurRad="101600" dist="38100" dir="8100000" algn="bl" rotWithShape="0">
               <a:srgbClr val="9EAFC0">
                 <a:alpha val="13000"/>
               </a:srgbClr>
@@ -8067,7 +7823,7 @@
           <a:bodyPr wrap="square" lIns="0" tIns="0" rIns="0" bIns="0" rtlCol="0" anchor="ctr"/>
           <a:lstStyle/>
           <a:p>
-            <a:pPr indent="0" marL="0">
+            <a:pPr marL="0" indent="0">
               <a:buNone/>
             </a:pPr>
             <a:r>
@@ -8106,7 +7862,7 @@
           <a:bodyPr wrap="square" lIns="0" tIns="0" rIns="0" bIns="0" rtlCol="0" anchor="ctr"/>
           <a:lstStyle/>
           <a:p>
-            <a:pPr indent="0" marL="0">
+            <a:pPr marL="0" indent="0">
               <a:buNone/>
             </a:pPr>
             <a:r>
@@ -8145,7 +7901,7 @@
           <a:bodyPr wrap="square" lIns="0" tIns="0" rIns="0" bIns="0" rtlCol="0" anchor="ctr"/>
           <a:lstStyle/>
           <a:p>
-            <a:pPr indent="0" marL="0">
+            <a:pPr marL="0" indent="0">
               <a:buNone/>
             </a:pPr>
             <a:r>
@@ -8207,7 +7963,7 @@
           <a:bodyPr wrap="square" lIns="0" tIns="0" rIns="0" bIns="0" rtlCol="0" anchor="ctr"/>
           <a:lstStyle/>
           <a:p>
-            <a:pPr indent="0" marL="0">
+            <a:pPr marL="0" indent="0">
               <a:lnSpc>
                 <a:spcPct val="120000"/>
               </a:lnSpc>
@@ -8252,7 +8008,7 @@
             <a:prstDash val="solid"/>
           </a:ln>
           <a:effectLst>
-            <a:outerShdw sx="100000" sy="100000" kx="0" ky="0" algn="bl" rotWithShape="0" blurRad="101600" dist="38100" dir="8100000">
+            <a:outerShdw blurRad="101600" dist="38100" dir="8100000" algn="bl" rotWithShape="0">
               <a:srgbClr val="9EAFC0">
                 <a:alpha val="13000"/>
               </a:srgbClr>
@@ -8306,7 +8062,7 @@
           <a:bodyPr wrap="square" lIns="0" tIns="0" rIns="0" bIns="0" rtlCol="0" anchor="ctr"/>
           <a:lstStyle/>
           <a:p>
-            <a:pPr indent="0" marL="0">
+            <a:pPr marL="0" indent="0">
               <a:buNone/>
             </a:pPr>
             <a:r>
@@ -8345,7 +8101,7 @@
           <a:bodyPr wrap="square" lIns="0" tIns="0" rIns="0" bIns="0" rtlCol="0" anchor="ctr"/>
           <a:lstStyle/>
           <a:p>
-            <a:pPr indent="0" marL="0">
+            <a:pPr marL="0" indent="0">
               <a:buNone/>
             </a:pPr>
             <a:r>
@@ -8384,7 +8140,7 @@
           <a:bodyPr wrap="square" lIns="0" tIns="0" rIns="0" bIns="0" rtlCol="0" anchor="ctr"/>
           <a:lstStyle/>
           <a:p>
-            <a:pPr indent="0" marL="0">
+            <a:pPr marL="0" indent="0">
               <a:buNone/>
             </a:pPr>
             <a:r>
@@ -8446,7 +8202,7 @@
           <a:bodyPr wrap="square" lIns="0" tIns="0" rIns="0" bIns="0" rtlCol="0" anchor="ctr"/>
           <a:lstStyle/>
           <a:p>
-            <a:pPr indent="0" marL="0">
+            <a:pPr marL="0" indent="0">
               <a:lnSpc>
                 <a:spcPct val="120000"/>
               </a:lnSpc>
@@ -8513,7 +8269,7 @@
           <a:bodyPr wrap="square" lIns="0" tIns="0" rIns="0" bIns="0" rtlCol="0" anchor="ctr"/>
           <a:lstStyle/>
           <a:p>
-            <a:pPr indent="0" marL="0">
+            <a:pPr marL="0" indent="0">
               <a:buNone/>
             </a:pPr>
             <a:r>
@@ -8577,7 +8333,7 @@
           <a:bodyPr wrap="square" lIns="0" tIns="0" rIns="0" bIns="0" rtlCol="0" anchor="ctr"/>
           <a:lstStyle/>
           <a:p>
-            <a:pPr indent="0" marL="0">
+            <a:pPr marL="0" indent="0">
               <a:buNone/>
             </a:pPr>
             <a:r>
@@ -8611,6 +8367,7 @@
         <a:solidFill>
           <a:srgbClr val="F7F9FC"/>
         </a:solidFill>
+        <a:effectLst/>
       </p:bgPr>
     </p:bg>
     <p:spTree>
@@ -8673,7 +8430,7 @@
           <a:bodyPr wrap="square" lIns="0" tIns="0" rIns="0" bIns="0" rtlCol="0" anchor="ctr"/>
           <a:lstStyle/>
           <a:p>
-            <a:pPr indent="0" marL="0">
+            <a:pPr marL="0" indent="0">
               <a:buNone/>
             </a:pPr>
             <a:r>
@@ -8712,7 +8469,7 @@
           <a:bodyPr wrap="square" lIns="0" tIns="0" rIns="0" bIns="0" rtlCol="0" anchor="ctr"/>
           <a:lstStyle/>
           <a:p>
-            <a:pPr indent="0" marL="0">
+            <a:pPr marL="0" indent="0">
               <a:buNone/>
             </a:pPr>
             <a:r>
@@ -8751,7 +8508,7 @@
           <a:bodyPr wrap="square" lIns="0" tIns="0" rIns="0" bIns="0" rtlCol="0" anchor="ctr"/>
           <a:lstStyle/>
           <a:p>
-            <a:pPr indent="0" marL="0">
+            <a:pPr marL="0" indent="0">
               <a:buNone/>
             </a:pPr>
             <a:r>
@@ -8793,7 +8550,7 @@
             <a:prstDash val="solid"/>
           </a:ln>
           <a:effectLst>
-            <a:outerShdw sx="100000" sy="100000" kx="0" ky="0" algn="bl" rotWithShape="0" blurRad="101600" dist="38100" dir="8100000">
+            <a:outerShdw blurRad="101600" dist="38100" dir="8100000" algn="bl" rotWithShape="0">
               <a:srgbClr val="9EAFC0">
                 <a:alpha val="13000"/>
               </a:srgbClr>
@@ -8872,7 +8629,7 @@
           <a:bodyPr wrap="square" lIns="0" tIns="0" rIns="0" bIns="0" rtlCol="0" anchor="ctr"/>
           <a:lstStyle/>
           <a:p>
-            <a:pPr algn="ctr" indent="0" marL="0">
+            <a:pPr marL="0" indent="0" algn="ctr">
               <a:buNone/>
             </a:pPr>
             <a:r>
@@ -8911,7 +8668,7 @@
           <a:bodyPr wrap="square" lIns="0" tIns="0" rIns="0" bIns="0" rtlCol="0" anchor="ctr"/>
           <a:lstStyle/>
           <a:p>
-            <a:pPr indent="0" marL="0">
+            <a:pPr marL="0" indent="0">
               <a:buNone/>
             </a:pPr>
             <a:r>
@@ -8975,7 +8732,7 @@
           <a:bodyPr wrap="square" lIns="0" tIns="0" rIns="0" bIns="0" rtlCol="0" anchor="ctr"/>
           <a:lstStyle/>
           <a:p>
-            <a:pPr indent="0" marL="0">
+            <a:pPr marL="0" indent="0">
               <a:buNone/>
             </a:pPr>
             <a:r>
@@ -9014,7 +8771,7 @@
           <a:bodyPr wrap="square" lIns="0" tIns="0" rIns="0" bIns="0" rtlCol="0" anchor="ctr"/>
           <a:lstStyle/>
           <a:p>
-            <a:pPr indent="0" marL="0">
+            <a:pPr marL="0" indent="0">
               <a:lnSpc>
                 <a:spcPct val="130000"/>
               </a:lnSpc>
@@ -9034,7 +8791,7 @@
             <a:endParaRPr lang="en-US" sz="900" dirty="0"/>
           </a:p>
           <a:p>
-            <a:pPr indent="0" marL="0">
+            <a:pPr marL="0" indent="0">
               <a:lnSpc>
                 <a:spcPct val="130000"/>
               </a:lnSpc>
@@ -9079,7 +8836,7 @@
             <a:prstDash val="solid"/>
           </a:ln>
           <a:effectLst>
-            <a:outerShdw sx="100000" sy="100000" kx="0" ky="0" algn="bl" rotWithShape="0" blurRad="101600" dist="38100" dir="8100000">
+            <a:outerShdw blurRad="101600" dist="38100" dir="8100000" algn="bl" rotWithShape="0">
               <a:srgbClr val="9EAFC0">
                 <a:alpha val="13000"/>
               </a:srgbClr>
@@ -9158,7 +8915,7 @@
           <a:bodyPr wrap="square" lIns="0" tIns="0" rIns="0" bIns="0" rtlCol="0" anchor="ctr"/>
           <a:lstStyle/>
           <a:p>
-            <a:pPr algn="ctr" indent="0" marL="0">
+            <a:pPr marL="0" indent="0" algn="ctr">
               <a:buNone/>
             </a:pPr>
             <a:r>
@@ -9197,7 +8954,7 @@
           <a:bodyPr wrap="square" lIns="0" tIns="0" rIns="0" bIns="0" rtlCol="0" anchor="ctr"/>
           <a:lstStyle/>
           <a:p>
-            <a:pPr indent="0" marL="0">
+            <a:pPr marL="0" indent="0">
               <a:buNone/>
             </a:pPr>
             <a:r>
@@ -9261,7 +9018,7 @@
           <a:bodyPr wrap="square" lIns="0" tIns="0" rIns="0" bIns="0" rtlCol="0" anchor="ctr"/>
           <a:lstStyle/>
           <a:p>
-            <a:pPr indent="0" marL="0">
+            <a:pPr marL="0" indent="0">
               <a:buNone/>
             </a:pPr>
             <a:r>
@@ -9300,7 +9057,7 @@
           <a:bodyPr wrap="square" lIns="0" tIns="0" rIns="0" bIns="0" rtlCol="0" anchor="ctr"/>
           <a:lstStyle/>
           <a:p>
-            <a:pPr indent="0" marL="0">
+            <a:pPr marL="0" indent="0">
               <a:lnSpc>
                 <a:spcPct val="130000"/>
               </a:lnSpc>
@@ -9320,7 +9077,7 @@
             <a:endParaRPr lang="en-US" sz="900" dirty="0"/>
           </a:p>
           <a:p>
-            <a:pPr indent="0" marL="0">
+            <a:pPr marL="0" indent="0">
               <a:lnSpc>
                 <a:spcPct val="130000"/>
               </a:lnSpc>
@@ -9365,7 +9122,7 @@
             <a:prstDash val="solid"/>
           </a:ln>
           <a:effectLst>
-            <a:outerShdw sx="100000" sy="100000" kx="0" ky="0" algn="bl" rotWithShape="0" blurRad="101600" dist="38100" dir="8100000">
+            <a:outerShdw blurRad="101600" dist="38100" dir="8100000" algn="bl" rotWithShape="0">
               <a:srgbClr val="9EAFC0">
                 <a:alpha val="13000"/>
               </a:srgbClr>
@@ -9444,7 +9201,7 @@
           <a:bodyPr wrap="square" lIns="0" tIns="0" rIns="0" bIns="0" rtlCol="0" anchor="ctr"/>
           <a:lstStyle/>
           <a:p>
-            <a:pPr algn="ctr" indent="0" marL="0">
+            <a:pPr marL="0" indent="0" algn="ctr">
               <a:buNone/>
             </a:pPr>
             <a:r>
@@ -9483,7 +9240,7 @@
           <a:bodyPr wrap="square" lIns="0" tIns="0" rIns="0" bIns="0" rtlCol="0" anchor="ctr"/>
           <a:lstStyle/>
           <a:p>
-            <a:pPr indent="0" marL="0">
+            <a:pPr marL="0" indent="0">
               <a:buNone/>
             </a:pPr>
             <a:r>
@@ -9547,7 +9304,7 @@
           <a:bodyPr wrap="square" lIns="0" tIns="0" rIns="0" bIns="0" rtlCol="0" anchor="ctr"/>
           <a:lstStyle/>
           <a:p>
-            <a:pPr indent="0" marL="0">
+            <a:pPr marL="0" indent="0">
               <a:buNone/>
             </a:pPr>
             <a:r>
@@ -9586,7 +9343,7 @@
           <a:bodyPr wrap="square" lIns="0" tIns="0" rIns="0" bIns="0" rtlCol="0" anchor="ctr"/>
           <a:lstStyle/>
           <a:p>
-            <a:pPr indent="0" marL="0">
+            <a:pPr marL="0" indent="0">
               <a:lnSpc>
                 <a:spcPct val="130000"/>
               </a:lnSpc>
@@ -9606,7 +9363,7 @@
             <a:endParaRPr lang="en-US" sz="900" dirty="0"/>
           </a:p>
           <a:p>
-            <a:pPr indent="0" marL="0">
+            <a:pPr marL="0" indent="0">
               <a:lnSpc>
                 <a:spcPct val="130000"/>
               </a:lnSpc>
@@ -9651,7 +9408,7 @@
             <a:prstDash val="solid"/>
           </a:ln>
           <a:effectLst>
-            <a:outerShdw sx="100000" sy="100000" kx="0" ky="0" algn="bl" rotWithShape="0" blurRad="101600" dist="38100" dir="8100000">
+            <a:outerShdw blurRad="101600" dist="38100" dir="8100000" algn="bl" rotWithShape="0">
               <a:srgbClr val="9EAFC0">
                 <a:alpha val="13000"/>
               </a:srgbClr>
@@ -9730,7 +9487,7 @@
           <a:bodyPr wrap="square" lIns="0" tIns="0" rIns="0" bIns="0" rtlCol="0" anchor="ctr"/>
           <a:lstStyle/>
           <a:p>
-            <a:pPr algn="ctr" indent="0" marL="0">
+            <a:pPr marL="0" indent="0" algn="ctr">
               <a:buNone/>
             </a:pPr>
             <a:r>
@@ -9769,7 +9526,7 @@
           <a:bodyPr wrap="square" lIns="0" tIns="0" rIns="0" bIns="0" rtlCol="0" anchor="ctr"/>
           <a:lstStyle/>
           <a:p>
-            <a:pPr indent="0" marL="0">
+            <a:pPr marL="0" indent="0">
               <a:buNone/>
             </a:pPr>
             <a:r>
@@ -9833,7 +9590,7 @@
           <a:bodyPr wrap="square" lIns="0" tIns="0" rIns="0" bIns="0" rtlCol="0" anchor="ctr"/>
           <a:lstStyle/>
           <a:p>
-            <a:pPr indent="0" marL="0">
+            <a:pPr marL="0" indent="0">
               <a:buNone/>
             </a:pPr>
             <a:r>
@@ -9872,7 +9629,7 @@
           <a:bodyPr wrap="square" lIns="0" tIns="0" rIns="0" bIns="0" rtlCol="0" anchor="ctr"/>
           <a:lstStyle/>
           <a:p>
-            <a:pPr indent="0" marL="0">
+            <a:pPr marL="0" indent="0">
               <a:lnSpc>
                 <a:spcPct val="130000"/>
               </a:lnSpc>
@@ -9892,7 +9649,7 @@
             <a:endParaRPr lang="en-US" sz="900" dirty="0"/>
           </a:p>
           <a:p>
-            <a:pPr indent="0" marL="0">
+            <a:pPr marL="0" indent="0">
               <a:lnSpc>
                 <a:spcPct val="130000"/>
               </a:lnSpc>
@@ -9959,7 +9716,7 @@
           <a:bodyPr wrap="square" lIns="0" tIns="0" rIns="0" bIns="0" rtlCol="0" anchor="ctr"/>
           <a:lstStyle/>
           <a:p>
-            <a:pPr indent="0" marL="0">
+            <a:pPr marL="0" indent="0">
               <a:buNone/>
             </a:pPr>
             <a:r>
@@ -9993,6 +9750,7 @@
         <a:solidFill>
           <a:srgbClr val="1A2B3C"/>
         </a:solidFill>
+        <a:effectLst/>
       </p:bgPr>
     </p:bg>
     <p:spTree>
@@ -10045,7 +9803,7 @@
             <a:off x="237744" y="137160"/>
             <a:ext cx="155448" cy="155448"/>
           </a:xfrm>
-          <a:prstGeom prst="oval">
+          <a:prstGeom prst="line">
             <a:avLst/>
           </a:prstGeom>
           <a:solidFill>
@@ -10070,7 +9828,7 @@
             <a:off x="512064" y="137160"/>
             <a:ext cx="155448" cy="155448"/>
           </a:xfrm>
-          <a:prstGeom prst="oval">
+          <a:prstGeom prst="line">
             <a:avLst/>
           </a:prstGeom>
           <a:solidFill>
@@ -10095,7 +9853,7 @@
             <a:off x="786384" y="137160"/>
             <a:ext cx="155448" cy="155448"/>
           </a:xfrm>
-          <a:prstGeom prst="oval">
+          <a:prstGeom prst="line">
             <a:avLst/>
           </a:prstGeom>
           <a:solidFill>
@@ -10130,7 +9888,7 @@
           <a:bodyPr wrap="square" lIns="0" tIns="0" rIns="0" bIns="0" rtlCol="0" anchor="ctr"/>
           <a:lstStyle/>
           <a:p>
-            <a:pPr algn="ctr" indent="0" marL="0">
+            <a:pPr marL="0" indent="0" algn="ctr">
               <a:buNone/>
             </a:pPr>
             <a:r>
@@ -10219,7 +9977,7 @@
           <a:bodyPr wrap="square" lIns="0" tIns="0" rIns="0" bIns="0" rtlCol="0" anchor="ctr"/>
           <a:lstStyle/>
           <a:p>
-            <a:pPr indent="0" marL="0">
+            <a:pPr marL="0" indent="0">
               <a:buNone/>
             </a:pPr>
             <a:r>
@@ -10258,7 +10016,7 @@
           <a:bodyPr wrap="square" lIns="0" tIns="0" rIns="0" bIns="0" rtlCol="0" anchor="ctr"/>
           <a:lstStyle/>
           <a:p>
-            <a:pPr indent="0" marL="0">
+            <a:pPr marL="0" indent="0">
               <a:buNone/>
             </a:pPr>
             <a:r>
@@ -10297,7 +10055,7 @@
           <a:bodyPr wrap="square" lIns="0" tIns="0" rIns="0" bIns="0" rtlCol="0" anchor="ctr"/>
           <a:lstStyle/>
           <a:p>
-            <a:pPr indent="0" marL="0">
+            <a:pPr marL="0" indent="0">
               <a:buNone/>
             </a:pPr>
             <a:r>
@@ -10336,7 +10094,7 @@
           <a:bodyPr wrap="square" lIns="0" tIns="0" rIns="0" bIns="0" rtlCol="0" anchor="ctr"/>
           <a:lstStyle/>
           <a:p>
-            <a:pPr indent="0" marL="0">
+            <a:pPr marL="0" indent="0">
               <a:buNone/>
             </a:pPr>
             <a:r>
@@ -10375,7 +10133,7 @@
           <a:bodyPr wrap="square" lIns="0" tIns="0" rIns="0" bIns="0" rtlCol="0" anchor="ctr"/>
           <a:lstStyle/>
           <a:p>
-            <a:pPr indent="0" marL="0">
+            <a:pPr marL="0" indent="0">
               <a:buNone/>
             </a:pPr>
             <a:r>
@@ -10414,7 +10172,7 @@
           <a:bodyPr wrap="square" lIns="0" tIns="0" rIns="0" bIns="0" rtlCol="0" anchor="ctr"/>
           <a:lstStyle/>
           <a:p>
-            <a:pPr indent="0" marL="0">
+            <a:pPr marL="0" indent="0">
               <a:buNone/>
             </a:pPr>
             <a:r>
@@ -10453,7 +10211,7 @@
           <a:bodyPr wrap="square" lIns="0" tIns="0" rIns="0" bIns="0" rtlCol="0" anchor="ctr"/>
           <a:lstStyle/>
           <a:p>
-            <a:pPr indent="0" marL="0">
+            <a:pPr marL="0" indent="0">
               <a:buNone/>
             </a:pPr>
             <a:r>
@@ -10542,7 +10300,7 @@
           <a:bodyPr wrap="square" lIns="0" tIns="0" rIns="0" bIns="0" rtlCol="0" anchor="ctr"/>
           <a:lstStyle/>
           <a:p>
-            <a:pPr indent="0" marL="0">
+            <a:pPr marL="0" indent="0">
               <a:buNone/>
             </a:pPr>
             <a:r>
@@ -10581,7 +10339,7 @@
           <a:bodyPr wrap="square" lIns="0" tIns="0" rIns="0" bIns="0" rtlCol="0" anchor="ctr"/>
           <a:lstStyle/>
           <a:p>
-            <a:pPr indent="0" marL="0">
+            <a:pPr marL="0" indent="0">
               <a:buNone/>
             </a:pPr>
             <a:r>
@@ -10620,7 +10378,7 @@
           <a:bodyPr wrap="square" lIns="0" tIns="0" rIns="0" bIns="0" rtlCol="0" anchor="ctr"/>
           <a:lstStyle/>
           <a:p>
-            <a:pPr indent="0" marL="0">
+            <a:pPr marL="0" indent="0">
               <a:buNone/>
             </a:pPr>
             <a:r>
@@ -10659,7 +10417,7 @@
           <a:bodyPr wrap="square" lIns="0" tIns="0" rIns="0" bIns="0" rtlCol="0" anchor="ctr"/>
           <a:lstStyle/>
           <a:p>
-            <a:pPr indent="0" marL="0">
+            <a:pPr marL="0" indent="0">
               <a:buNone/>
             </a:pPr>
             <a:r>
@@ -10698,7 +10456,7 @@
           <a:bodyPr wrap="square" lIns="0" tIns="0" rIns="0" bIns="0" rtlCol="0" anchor="ctr"/>
           <a:lstStyle/>
           <a:p>
-            <a:pPr indent="0" marL="0">
+            <a:pPr marL="0" indent="0">
               <a:buNone/>
             </a:pPr>
             <a:r>
@@ -10737,7 +10495,7 @@
           <a:bodyPr wrap="square" lIns="0" tIns="0" rIns="0" bIns="0" rtlCol="0" anchor="ctr"/>
           <a:lstStyle/>
           <a:p>
-            <a:pPr indent="0" marL="0">
+            <a:pPr marL="0" indent="0">
               <a:buNone/>
             </a:pPr>
             <a:r>
@@ -10776,7 +10534,7 @@
           <a:bodyPr wrap="square" lIns="0" tIns="0" rIns="0" bIns="0" rtlCol="0" anchor="ctr"/>
           <a:lstStyle/>
           <a:p>
-            <a:pPr indent="0" marL="0">
+            <a:pPr marL="0" indent="0">
               <a:buNone/>
             </a:pPr>
             <a:r>
@@ -10815,7 +10573,7 @@
           <a:bodyPr wrap="square" lIns="0" tIns="0" rIns="0" bIns="0" rtlCol="0" anchor="ctr"/>
           <a:lstStyle/>
           <a:p>
-            <a:pPr indent="0" marL="0">
+            <a:pPr marL="0" indent="0">
               <a:buNone/>
             </a:pPr>
             <a:r>
@@ -10904,7 +10662,7 @@
           <a:bodyPr wrap="square" lIns="0" tIns="0" rIns="0" bIns="0" rtlCol="0" anchor="ctr"/>
           <a:lstStyle/>
           <a:p>
-            <a:pPr indent="0" marL="0">
+            <a:pPr marL="0" indent="0">
               <a:buNone/>
             </a:pPr>
             <a:r>
@@ -10943,7 +10701,7 @@
           <a:bodyPr wrap="square" lIns="0" tIns="0" rIns="0" bIns="0" rtlCol="0" anchor="ctr"/>
           <a:lstStyle/>
           <a:p>
-            <a:pPr indent="0" marL="0">
+            <a:pPr marL="0" indent="0">
               <a:buNone/>
             </a:pPr>
             <a:r>
@@ -10982,7 +10740,7 @@
           <a:bodyPr wrap="square" lIns="0" tIns="0" rIns="0" bIns="0" rtlCol="0" anchor="ctr"/>
           <a:lstStyle/>
           <a:p>
-            <a:pPr indent="0" marL="0">
+            <a:pPr marL="0" indent="0">
               <a:buNone/>
             </a:pPr>
             <a:r>
@@ -11021,7 +10779,7 @@
           <a:bodyPr wrap="square" lIns="0" tIns="0" rIns="0" bIns="0" rtlCol="0" anchor="ctr"/>
           <a:lstStyle/>
           <a:p>
-            <a:pPr indent="0" marL="0">
+            <a:pPr marL="0" indent="0">
               <a:buNone/>
             </a:pPr>
             <a:r>
@@ -11060,7 +10818,7 @@
           <a:bodyPr wrap="square" lIns="0" tIns="0" rIns="0" bIns="0" rtlCol="0" anchor="ctr"/>
           <a:lstStyle/>
           <a:p>
-            <a:pPr indent="0" marL="0">
+            <a:pPr marL="0" indent="0">
               <a:buNone/>
             </a:pPr>
             <a:r>
@@ -11099,7 +10857,7 @@
           <a:bodyPr wrap="square" lIns="0" tIns="0" rIns="0" bIns="0" rtlCol="0" anchor="ctr"/>
           <a:lstStyle/>
           <a:p>
-            <a:pPr indent="0" marL="0">
+            <a:pPr marL="0" indent="0">
               <a:buNone/>
             </a:pPr>
             <a:r>
@@ -11138,7 +10896,7 @@
           <a:bodyPr wrap="square" lIns="0" tIns="0" rIns="0" bIns="0" rtlCol="0" anchor="ctr"/>
           <a:lstStyle/>
           <a:p>
-            <a:pPr indent="0" marL="0">
+            <a:pPr marL="0" indent="0">
               <a:buNone/>
             </a:pPr>
             <a:r>
@@ -11172,6 +10930,7 @@
         <a:solidFill>
           <a:srgbClr val="FFFFFF"/>
         </a:solidFill>
+        <a:effectLst/>
       </p:bgPr>
     </p:bg>
     <p:spTree>
@@ -11249,7 +11008,7 @@
             <a:off x="91440" y="2651760"/>
             <a:ext cx="3566160" cy="3566160"/>
           </a:xfrm>
-          <a:prstGeom prst="oval">
+          <a:prstGeom prst="line">
             <a:avLst/>
           </a:prstGeom>
           <a:solidFill>
@@ -11288,7 +11047,7 @@
           <a:bodyPr wrap="square" lIns="0" tIns="0" rIns="0" bIns="0" rtlCol="0" anchor="ctr"/>
           <a:lstStyle/>
           <a:p>
-            <a:pPr indent="0" marL="0">
+            <a:pPr marL="0" indent="0">
               <a:lnSpc>
                 <a:spcPct val="108000"/>
               </a:lnSpc>
@@ -11308,7 +11067,7 @@
             <a:endParaRPr lang="en-US" sz="3400" dirty="0"/>
           </a:p>
           <a:p>
-            <a:pPr indent="0" marL="0">
+            <a:pPr marL="0" indent="0">
               <a:lnSpc>
                 <a:spcPct val="108000"/>
               </a:lnSpc>
@@ -11373,7 +11132,7 @@
           <a:bodyPr wrap="square" lIns="0" tIns="0" rIns="0" bIns="0" rtlCol="0" anchor="ctr"/>
           <a:lstStyle/>
           <a:p>
-            <a:pPr indent="0" marL="0">
+            <a:pPr marL="0" indent="0">
               <a:buNone/>
             </a:pPr>
             <a:r>
@@ -11412,7 +11171,7 @@
           <a:bodyPr wrap="square" lIns="0" tIns="0" rIns="0" bIns="0" rtlCol="0" anchor="ctr"/>
           <a:lstStyle/>
           <a:p>
-            <a:pPr indent="0" marL="0">
+            <a:pPr marL="0" indent="0">
               <a:buNone/>
             </a:pPr>
             <a:r>
@@ -11464,7 +11223,7 @@
             <a:off x="4069080" y="978408"/>
             <a:ext cx="146304" cy="146304"/>
           </a:xfrm>
-          <a:prstGeom prst="oval">
+          <a:prstGeom prst="line">
             <a:avLst/>
           </a:prstGeom>
           <a:solidFill>
@@ -11499,7 +11258,7 @@
           <a:bodyPr wrap="square" lIns="0" tIns="0" rIns="0" bIns="0" rtlCol="0" anchor="ctr"/>
           <a:lstStyle/>
           <a:p>
-            <a:pPr indent="0" marL="0">
+            <a:pPr marL="0" indent="0">
               <a:buNone/>
             </a:pPr>
             <a:r>
@@ -11528,7 +11287,7 @@
             <a:off x="4069080" y="1453896"/>
             <a:ext cx="146304" cy="146304"/>
           </a:xfrm>
-          <a:prstGeom prst="oval">
+          <a:prstGeom prst="line">
             <a:avLst/>
           </a:prstGeom>
           <a:solidFill>
@@ -11563,7 +11322,7 @@
           <a:bodyPr wrap="square" lIns="0" tIns="0" rIns="0" bIns="0" rtlCol="0" anchor="ctr"/>
           <a:lstStyle/>
           <a:p>
-            <a:pPr indent="0" marL="0">
+            <a:pPr marL="0" indent="0">
               <a:buNone/>
             </a:pPr>
             <a:r>
@@ -11592,7 +11351,7 @@
             <a:off x="4069080" y="1929384"/>
             <a:ext cx="146304" cy="146304"/>
           </a:xfrm>
-          <a:prstGeom prst="oval">
+          <a:prstGeom prst="line">
             <a:avLst/>
           </a:prstGeom>
           <a:solidFill>
@@ -11627,7 +11386,7 @@
           <a:bodyPr wrap="square" lIns="0" tIns="0" rIns="0" bIns="0" rtlCol="0" anchor="ctr"/>
           <a:lstStyle/>
           <a:p>
-            <a:pPr indent="0" marL="0">
+            <a:pPr marL="0" indent="0">
               <a:buNone/>
             </a:pPr>
             <a:r>
@@ -11656,7 +11415,7 @@
             <a:off x="4069080" y="2404872"/>
             <a:ext cx="146304" cy="146304"/>
           </a:xfrm>
-          <a:prstGeom prst="oval">
+          <a:prstGeom prst="line">
             <a:avLst/>
           </a:prstGeom>
           <a:solidFill>
@@ -11691,7 +11450,7 @@
           <a:bodyPr wrap="square" lIns="0" tIns="0" rIns="0" bIns="0" rtlCol="0" anchor="ctr"/>
           <a:lstStyle/>
           <a:p>
-            <a:pPr indent="0" marL="0">
+            <a:pPr marL="0" indent="0">
               <a:buNone/>
             </a:pPr>
             <a:r>
@@ -11720,7 +11479,7 @@
             <a:off x="4069080" y="2880360"/>
             <a:ext cx="146304" cy="146304"/>
           </a:xfrm>
-          <a:prstGeom prst="oval">
+          <a:prstGeom prst="line">
             <a:avLst/>
           </a:prstGeom>
           <a:solidFill>
@@ -11755,7 +11514,7 @@
           <a:bodyPr wrap="square" lIns="0" tIns="0" rIns="0" bIns="0" rtlCol="0" anchor="ctr"/>
           <a:lstStyle/>
           <a:p>
-            <a:pPr indent="0" marL="0">
+            <a:pPr marL="0" indent="0">
               <a:buNone/>
             </a:pPr>
             <a:r>
@@ -11784,7 +11543,7 @@
             <a:off x="4069080" y="3355848"/>
             <a:ext cx="146304" cy="146304"/>
           </a:xfrm>
-          <a:prstGeom prst="oval">
+          <a:prstGeom prst="line">
             <a:avLst/>
           </a:prstGeom>
           <a:solidFill>
@@ -11819,7 +11578,7 @@
           <a:bodyPr wrap="square" lIns="0" tIns="0" rIns="0" bIns="0" rtlCol="0" anchor="ctr"/>
           <a:lstStyle/>
           <a:p>
-            <a:pPr indent="0" marL="0">
+            <a:pPr marL="0" indent="0">
               <a:buNone/>
             </a:pPr>
             <a:r>
@@ -11883,7 +11642,7 @@
           <a:bodyPr wrap="square" lIns="0" tIns="0" rIns="0" bIns="0" rtlCol="0" anchor="ctr"/>
           <a:lstStyle/>
           <a:p>
-            <a:pPr indent="0" marL="0">
+            <a:pPr marL="0" indent="0">
               <a:buNone/>
             </a:pPr>
             <a:r>
@@ -11922,7 +11681,7 @@
           <a:bodyPr wrap="square" lIns="0" tIns="0" rIns="0" bIns="0" rtlCol="0" anchor="ctr"/>
           <a:lstStyle/>
           <a:p>
-            <a:pPr indent="0" marL="0">
+            <a:pPr marL="0" indent="0">
               <a:buNone/>
             </a:pPr>
             <a:r>
@@ -12241,4 +12000,319 @@
     </a:ext>
   </a:extLst>
 </a:theme>
+</file>
+
+<file path=ppt/theme/theme2.xml><?xml version="1.0" encoding="utf-8"?>
+<a:theme xmlns:a="http://schemas.openxmlformats.org/drawingml/2006/main" name="Office Theme">
+  <a:themeElements>
+    <a:clrScheme name="Office">
+      <a:dk1>
+        <a:sysClr val="windowText" lastClr="000000"/>
+      </a:dk1>
+      <a:lt1>
+        <a:sysClr val="window" lastClr="FFFFFF"/>
+      </a:lt1>
+      <a:dk2>
+        <a:srgbClr val="0E2841"/>
+      </a:dk2>
+      <a:lt2>
+        <a:srgbClr val="E8E8E8"/>
+      </a:lt2>
+      <a:accent1>
+        <a:srgbClr val="156082"/>
+      </a:accent1>
+      <a:accent2>
+        <a:srgbClr val="E97132"/>
+      </a:accent2>
+      <a:accent3>
+        <a:srgbClr val="196B24"/>
+      </a:accent3>
+      <a:accent4>
+        <a:srgbClr val="0F9ED5"/>
+      </a:accent4>
+      <a:accent5>
+        <a:srgbClr val="A02B93"/>
+      </a:accent5>
+      <a:accent6>
+        <a:srgbClr val="4EA72E"/>
+      </a:accent6>
+      <a:hlink>
+        <a:srgbClr val="467886"/>
+      </a:hlink>
+      <a:folHlink>
+        <a:srgbClr val="96607D"/>
+      </a:folHlink>
+    </a:clrScheme>
+    <a:fontScheme name="Office">
+      <a:majorFont>
+        <a:latin typeface="Aptos Display" panose="02110004020202020204"/>
+        <a:ea typeface=""/>
+        <a:cs typeface=""/>
+        <a:font script="Jpan" typeface="游ゴシック Light"/>
+        <a:font script="Hang" typeface="맑은 고딕"/>
+        <a:font script="Hans" typeface="等线 Light"/>
+        <a:font script="Hant" typeface="新細明體"/>
+        <a:font script="Arab" typeface="Times New Roman"/>
+        <a:font script="Hebr" typeface="Times New Roman"/>
+        <a:font script="Thai" typeface="Angsana New"/>
+        <a:font script="Ethi" typeface="Nyala"/>
+        <a:font script="Beng" typeface="Vrinda"/>
+        <a:font script="Gujr" typeface="Shruti"/>
+        <a:font script="Khmr" typeface="MoolBoran"/>
+        <a:font script="Knda" typeface="Tunga"/>
+        <a:font script="Guru" typeface="Raavi"/>
+        <a:font script="Cans" typeface="Euphemia"/>
+        <a:font script="Cher" typeface="Plantagenet Cherokee"/>
+        <a:font script="Yiii" typeface="Microsoft Yi Baiti"/>
+        <a:font script="Tibt" typeface="Microsoft Himalaya"/>
+        <a:font script="Thaa" typeface="MV Boli"/>
+        <a:font script="Deva" typeface="Mangal"/>
+        <a:font script="Telu" typeface="Gautami"/>
+        <a:font script="Taml" typeface="Latha"/>
+        <a:font script="Syrc" typeface="Estrangelo Edessa"/>
+        <a:font script="Orya" typeface="Kalinga"/>
+        <a:font script="Mlym" typeface="Kartika"/>
+        <a:font script="Laoo" typeface="DokChampa"/>
+        <a:font script="Sinh" typeface="Iskoola Pota"/>
+        <a:font script="Mong" typeface="Mongolian Baiti"/>
+        <a:font script="Viet" typeface="Times New Roman"/>
+        <a:font script="Uigh" typeface="Microsoft Uighur"/>
+        <a:font script="Geor" typeface="Sylfaen"/>
+        <a:font script="Armn" typeface="Arial"/>
+        <a:font script="Bugi" typeface="Leelawadee UI"/>
+        <a:font script="Bopo" typeface="Microsoft JhengHei"/>
+        <a:font script="Java" typeface="Javanese Text"/>
+        <a:font script="Lisu" typeface="Segoe UI"/>
+        <a:font script="Mymr" typeface="Myanmar Text"/>
+        <a:font script="Nkoo" typeface="Ebrima"/>
+        <a:font script="Olck" typeface="Nirmala UI"/>
+        <a:font script="Osma" typeface="Ebrima"/>
+        <a:font script="Phag" typeface="Phagspa"/>
+        <a:font script="Syrn" typeface="Estrangelo Edessa"/>
+        <a:font script="Syrj" typeface="Estrangelo Edessa"/>
+        <a:font script="Syre" typeface="Estrangelo Edessa"/>
+        <a:font script="Sora" typeface="Nirmala UI"/>
+        <a:font script="Tale" typeface="Microsoft Tai Le"/>
+        <a:font script="Talu" typeface="Microsoft New Tai Lue"/>
+        <a:font script="Tfng" typeface="Ebrima"/>
+      </a:majorFont>
+      <a:minorFont>
+        <a:latin typeface="Aptos" panose="02110004020202020204"/>
+        <a:ea typeface=""/>
+        <a:cs typeface=""/>
+        <a:font script="Jpan" typeface="游ゴシック"/>
+        <a:font script="Hang" typeface="맑은 고딕"/>
+        <a:font script="Hans" typeface="等线"/>
+        <a:font script="Hant" typeface="新細明體"/>
+        <a:font script="Arab" typeface="Arial"/>
+        <a:font script="Hebr" typeface="Arial"/>
+        <a:font script="Thai" typeface="Cordia New"/>
+        <a:font script="Ethi" typeface="Nyala"/>
+        <a:font script="Beng" typeface="Vrinda"/>
+        <a:font script="Gujr" typeface="Shruti"/>
+        <a:font script="Khmr" typeface="DaunPenh"/>
+        <a:font script="Knda" typeface="Tunga"/>
+        <a:font script="Guru" typeface="Raavi"/>
+        <a:font script="Cans" typeface="Euphemia"/>
+        <a:font script="Cher" typeface="Plantagenet Cherokee"/>
+        <a:font script="Yiii" typeface="Microsoft Yi Baiti"/>
+        <a:font script="Tibt" typeface="Microsoft Himalaya"/>
+        <a:font script="Thaa" typeface="MV Boli"/>
+        <a:font script="Deva" typeface="Mangal"/>
+        <a:font script="Telu" typeface="Gautami"/>
+        <a:font script="Taml" typeface="Latha"/>
+        <a:font script="Syrc" typeface="Estrangelo Edessa"/>
+        <a:font script="Orya" typeface="Kalinga"/>
+        <a:font script="Mlym" typeface="Kartika"/>
+        <a:font script="Laoo" typeface="DokChampa"/>
+        <a:font script="Sinh" typeface="Iskoola Pota"/>
+        <a:font script="Mong" typeface="Mongolian Baiti"/>
+        <a:font script="Viet" typeface="Arial"/>
+        <a:font script="Uigh" typeface="Microsoft Uighur"/>
+        <a:font script="Geor" typeface="Sylfaen"/>
+        <a:font script="Armn" typeface="Arial"/>
+        <a:font script="Bugi" typeface="Leelawadee UI"/>
+        <a:font script="Bopo" typeface="Microsoft JhengHei"/>
+        <a:font script="Java" typeface="Javanese Text"/>
+        <a:font script="Lisu" typeface="Segoe UI"/>
+        <a:font script="Mymr" typeface="Myanmar Text"/>
+        <a:font script="Nkoo" typeface="Ebrima"/>
+        <a:font script="Olck" typeface="Nirmala UI"/>
+        <a:font script="Osma" typeface="Ebrima"/>
+        <a:font script="Phag" typeface="Phagspa"/>
+        <a:font script="Syrn" typeface="Estrangelo Edessa"/>
+        <a:font script="Syrj" typeface="Estrangelo Edessa"/>
+        <a:font script="Syre" typeface="Estrangelo Edessa"/>
+        <a:font script="Sora" typeface="Nirmala UI"/>
+        <a:font script="Tale" typeface="Microsoft Tai Le"/>
+        <a:font script="Talu" typeface="Microsoft New Tai Lue"/>
+        <a:font script="Tfng" typeface="Ebrima"/>
+      </a:minorFont>
+    </a:fontScheme>
+    <a:fmtScheme name="Office">
+      <a:fillStyleLst>
+        <a:solidFill>
+          <a:schemeClr val="phClr"/>
+        </a:solidFill>
+        <a:gradFill rotWithShape="1">
+          <a:gsLst>
+            <a:gs pos="0">
+              <a:schemeClr val="phClr">
+                <a:lumMod val="110000"/>
+                <a:satMod val="105000"/>
+                <a:tint val="67000"/>
+              </a:schemeClr>
+            </a:gs>
+            <a:gs pos="50000">
+              <a:schemeClr val="phClr">
+                <a:lumMod val="105000"/>
+                <a:satMod val="103000"/>
+                <a:tint val="73000"/>
+              </a:schemeClr>
+            </a:gs>
+            <a:gs pos="100000">
+              <a:schemeClr val="phClr">
+                <a:lumMod val="105000"/>
+                <a:satMod val="109000"/>
+                <a:tint val="81000"/>
+              </a:schemeClr>
+            </a:gs>
+          </a:gsLst>
+          <a:lin ang="5400000" scaled="0"/>
+        </a:gradFill>
+        <a:gradFill rotWithShape="1">
+          <a:gsLst>
+            <a:gs pos="0">
+              <a:schemeClr val="phClr">
+                <a:satMod val="103000"/>
+                <a:lumMod val="102000"/>
+                <a:tint val="94000"/>
+              </a:schemeClr>
+            </a:gs>
+            <a:gs pos="50000">
+              <a:schemeClr val="phClr">
+                <a:satMod val="110000"/>
+                <a:lumMod val="100000"/>
+                <a:shade val="100000"/>
+              </a:schemeClr>
+            </a:gs>
+            <a:gs pos="100000">
+              <a:schemeClr val="phClr">
+                <a:lumMod val="99000"/>
+                <a:satMod val="120000"/>
+                <a:shade val="78000"/>
+              </a:schemeClr>
+            </a:gs>
+          </a:gsLst>
+          <a:lin ang="5400000" scaled="0"/>
+        </a:gradFill>
+      </a:fillStyleLst>
+      <a:lnStyleLst>
+        <a:ln w="12700" cap="flat" cmpd="sng" algn="ctr">
+          <a:solidFill>
+            <a:schemeClr val="phClr"/>
+          </a:solidFill>
+          <a:prstDash val="solid"/>
+          <a:miter lim="800000"/>
+        </a:ln>
+        <a:ln w="19050" cap="flat" cmpd="sng" algn="ctr">
+          <a:solidFill>
+            <a:schemeClr val="phClr"/>
+          </a:solidFill>
+          <a:prstDash val="solid"/>
+          <a:miter lim="800000"/>
+        </a:ln>
+        <a:ln w="25400" cap="flat" cmpd="sng" algn="ctr">
+          <a:solidFill>
+            <a:schemeClr val="phClr"/>
+          </a:solidFill>
+          <a:prstDash val="solid"/>
+          <a:miter lim="800000"/>
+        </a:ln>
+      </a:lnStyleLst>
+      <a:effectStyleLst>
+        <a:effectStyle>
+          <a:effectLst/>
+        </a:effectStyle>
+        <a:effectStyle>
+          <a:effectLst/>
+        </a:effectStyle>
+        <a:effectStyle>
+          <a:effectLst>
+            <a:outerShdw blurRad="57150" dist="19050" dir="5400000" algn="ctr" rotWithShape="0">
+              <a:srgbClr val="000000">
+                <a:alpha val="63000"/>
+              </a:srgbClr>
+            </a:outerShdw>
+          </a:effectLst>
+        </a:effectStyle>
+      </a:effectStyleLst>
+      <a:bgFillStyleLst>
+        <a:solidFill>
+          <a:schemeClr val="phClr"/>
+        </a:solidFill>
+        <a:solidFill>
+          <a:schemeClr val="phClr">
+            <a:tint val="95000"/>
+            <a:satMod val="170000"/>
+          </a:schemeClr>
+        </a:solidFill>
+        <a:gradFill rotWithShape="1">
+          <a:gsLst>
+            <a:gs pos="0">
+              <a:schemeClr val="phClr">
+                <a:tint val="93000"/>
+                <a:satMod val="150000"/>
+                <a:shade val="98000"/>
+                <a:lumMod val="102000"/>
+              </a:schemeClr>
+            </a:gs>
+            <a:gs pos="50000">
+              <a:schemeClr val="phClr">
+                <a:tint val="98000"/>
+                <a:satMod val="130000"/>
+                <a:shade val="90000"/>
+                <a:lumMod val="103000"/>
+              </a:schemeClr>
+            </a:gs>
+            <a:gs pos="100000">
+              <a:schemeClr val="phClr">
+                <a:shade val="63000"/>
+                <a:satMod val="120000"/>
+              </a:schemeClr>
+            </a:gs>
+          </a:gsLst>
+          <a:lin ang="5400000" scaled="0"/>
+        </a:gradFill>
+      </a:bgFillStyleLst>
+    </a:fmtScheme>
+  </a:themeElements>
+  <a:objectDefaults>
+    <a:lnDef>
+      <a:spPr/>
+      <a:bodyPr/>
+      <a:lstStyle/>
+      <a:style>
+        <a:lnRef idx="2">
+          <a:schemeClr val="accent1"/>
+        </a:lnRef>
+        <a:fillRef idx="0">
+          <a:schemeClr val="accent1"/>
+        </a:fillRef>
+        <a:effectRef idx="1">
+          <a:schemeClr val="accent1"/>
+        </a:effectRef>
+        <a:fontRef idx="minor">
+          <a:schemeClr val="tx1"/>
+        </a:fontRef>
+      </a:style>
+    </a:lnDef>
+  </a:objectDefaults>
+  <a:extraClrSchemeLst/>
+  <a:extLst>
+    <a:ext uri="{05A4C25C-085E-4340-85A3-A5531E510DB2}">
+      <thm15:themeFamily xmlns:thm15="http://schemas.microsoft.com/office/thememl/2012/main" name="Office Theme" id="{2E142A2C-CD16-42D6-873A-C26D2A0506FA}" vid="{1BDDFF52-6CD6-40A5-AB3C-68EB2F1E4D0A}"/>
+    </a:ext>
+  </a:extLst>
+</a:theme>
 </file>
--- a/Clase_3/PPT/Clase03_GaussMarkov_BLUE.pptx
+++ b/Clase_3/PPT/Clase03_GaussMarkov_BLUE.pptx
@@ -3479,7 +3479,29 @@
                 <a:ea typeface="Calibri" pitchFamily="34" charset="-122"/>
                 <a:cs typeface="Calibri" pitchFamily="34" charset="-120"/>
               </a:rPr>
-              <a:t>Si se viola: Endogeneidad — variable omitida correlacionada con X</a:t>
+              <a:t>Si se viola: </a:t>
+            </a:r>
+            <a:r>
+              <a:rPr lang="en-US" sz="950" b="1" i="1" dirty="0">
+                <a:solidFill>
+                  <a:srgbClr val="FF0000"/>
+                </a:solidFill>
+                <a:latin typeface="Calibri" pitchFamily="34" charset="0"/>
+                <a:ea typeface="Calibri" pitchFamily="34" charset="-122"/>
+                <a:cs typeface="Calibri" pitchFamily="34" charset="-120"/>
+              </a:rPr>
+              <a:t>Endogeneidad</a:t>
+            </a:r>
+            <a:r>
+              <a:rPr lang="en-US" sz="950" i="1" dirty="0">
+                <a:solidFill>
+                  <a:srgbClr val="7A92A8"/>
+                </a:solidFill>
+                <a:latin typeface="Calibri" pitchFamily="34" charset="0"/>
+                <a:ea typeface="Calibri" pitchFamily="34" charset="-122"/>
+                <a:cs typeface="Calibri" pitchFamily="34" charset="-120"/>
+              </a:rPr>
+              <a:t> — variable omitida correlacionada con X</a:t>
             </a:r>
             <a:endParaRPr lang="en-US" sz="950" dirty="0"/>
           </a:p>
@@ -3731,7 +3753,7 @@
         </p:nvSpPr>
         <p:spPr>
           <a:xfrm>
-            <a:off x="320040" y="3401568"/>
+            <a:off x="320040" y="3419856"/>
             <a:ext cx="8503920" cy="694944"/>
           </a:xfrm>
           <a:prstGeom prst="rect">
@@ -5082,7 +5104,7 @@
         </p:nvSpPr>
         <p:spPr>
           <a:xfrm>
-            <a:off x="4572000" y="1078992"/>
+            <a:off x="4617720" y="1078992"/>
             <a:ext cx="4251960" cy="3822192"/>
           </a:xfrm>
           <a:prstGeom prst="rect">
@@ -5488,7 +5510,7 @@
         </p:nvSpPr>
         <p:spPr>
           <a:xfrm>
-            <a:off x="0" y="4754880"/>
+            <a:off x="-45719" y="4761738"/>
             <a:ext cx="9144000" cy="388620"/>
           </a:xfrm>
           <a:prstGeom prst="rect">
@@ -5538,9 +5560,288 @@
                 <a:ea typeface="Calibri" pitchFamily="34" charset="-122"/>
                 <a:cs typeface="Calibri" pitchFamily="34" charset="-120"/>
               </a:rPr>
-              <a:t>🎙 Ejecutar en vivo: simular 200 datasets, graficar histograma de β̂₁. Ver que está centrado en β_real.</a:t>
-            </a:r>
-            <a:endParaRPr lang="en-US" sz="850" dirty="0"/>
+              <a:t> </a:t>
+            </a:r>
+            <a:r>
+              <a:rPr lang="en-US" sz="850" b="1" i="1" dirty="0" err="1">
+                <a:solidFill>
+                  <a:schemeClr val="accent6">
+                    <a:lumMod val="75000"/>
+                  </a:schemeClr>
+                </a:solidFill>
+                <a:latin typeface="Calibri" pitchFamily="34" charset="0"/>
+                <a:ea typeface="Calibri" pitchFamily="34" charset="-122"/>
+                <a:cs typeface="Calibri" pitchFamily="34" charset="-120"/>
+              </a:rPr>
+              <a:t>Insesgado</a:t>
+            </a:r>
+            <a:r>
+              <a:rPr lang="en-US" sz="850" b="1" i="1" dirty="0">
+                <a:solidFill>
+                  <a:schemeClr val="accent6">
+                    <a:lumMod val="75000"/>
+                  </a:schemeClr>
+                </a:solidFill>
+                <a:latin typeface="Calibri" pitchFamily="34" charset="0"/>
+                <a:ea typeface="Calibri" pitchFamily="34" charset="-122"/>
+                <a:cs typeface="Calibri" pitchFamily="34" charset="-120"/>
+              </a:rPr>
+              <a:t> no </a:t>
+            </a:r>
+            <a:r>
+              <a:rPr lang="en-US" sz="850" b="1" i="1" dirty="0" err="1">
+                <a:solidFill>
+                  <a:schemeClr val="accent6">
+                    <a:lumMod val="75000"/>
+                  </a:schemeClr>
+                </a:solidFill>
+                <a:latin typeface="Calibri" pitchFamily="34" charset="0"/>
+                <a:ea typeface="Calibri" pitchFamily="34" charset="-122"/>
+                <a:cs typeface="Calibri" pitchFamily="34" charset="-120"/>
+              </a:rPr>
+              <a:t>significa</a:t>
+            </a:r>
+            <a:r>
+              <a:rPr lang="en-US" sz="850" b="1" i="1" dirty="0">
+                <a:solidFill>
+                  <a:schemeClr val="accent6">
+                    <a:lumMod val="75000"/>
+                  </a:schemeClr>
+                </a:solidFill>
+                <a:latin typeface="Calibri" pitchFamily="34" charset="0"/>
+                <a:ea typeface="Calibri" pitchFamily="34" charset="-122"/>
+                <a:cs typeface="Calibri" pitchFamily="34" charset="-120"/>
+              </a:rPr>
+              <a:t> perfecto </a:t>
+            </a:r>
+            <a:r>
+              <a:rPr lang="en-US" sz="850" b="1" i="1" dirty="0" err="1">
+                <a:solidFill>
+                  <a:schemeClr val="accent6">
+                    <a:lumMod val="75000"/>
+                  </a:schemeClr>
+                </a:solidFill>
+                <a:latin typeface="Calibri" pitchFamily="34" charset="0"/>
+                <a:ea typeface="Calibri" pitchFamily="34" charset="-122"/>
+                <a:cs typeface="Calibri" pitchFamily="34" charset="-120"/>
+              </a:rPr>
+              <a:t>en</a:t>
+            </a:r>
+            <a:r>
+              <a:rPr lang="en-US" sz="850" b="1" i="1" dirty="0">
+                <a:solidFill>
+                  <a:schemeClr val="accent6">
+                    <a:lumMod val="75000"/>
+                  </a:schemeClr>
+                </a:solidFill>
+                <a:latin typeface="Calibri" pitchFamily="34" charset="0"/>
+                <a:ea typeface="Calibri" pitchFamily="34" charset="-122"/>
+                <a:cs typeface="Calibri" pitchFamily="34" charset="-120"/>
+              </a:rPr>
+              <a:t> </a:t>
+            </a:r>
+            <a:r>
+              <a:rPr lang="en-US" sz="850" b="1" i="1" dirty="0" err="1">
+                <a:solidFill>
+                  <a:schemeClr val="accent6">
+                    <a:lumMod val="75000"/>
+                  </a:schemeClr>
+                </a:solidFill>
+                <a:latin typeface="Calibri" pitchFamily="34" charset="0"/>
+                <a:ea typeface="Calibri" pitchFamily="34" charset="-122"/>
+                <a:cs typeface="Calibri" pitchFamily="34" charset="-120"/>
+              </a:rPr>
+              <a:t>una</a:t>
+            </a:r>
+            <a:r>
+              <a:rPr lang="en-US" sz="850" b="1" i="1" dirty="0">
+                <a:solidFill>
+                  <a:schemeClr val="accent6">
+                    <a:lumMod val="75000"/>
+                  </a:schemeClr>
+                </a:solidFill>
+                <a:latin typeface="Calibri" pitchFamily="34" charset="0"/>
+                <a:ea typeface="Calibri" pitchFamily="34" charset="-122"/>
+                <a:cs typeface="Calibri" pitchFamily="34" charset="-120"/>
+              </a:rPr>
+              <a:t> </a:t>
+            </a:r>
+            <a:r>
+              <a:rPr lang="en-US" sz="850" b="1" i="1" dirty="0" err="1">
+                <a:solidFill>
+                  <a:schemeClr val="accent6">
+                    <a:lumMod val="75000"/>
+                  </a:schemeClr>
+                </a:solidFill>
+                <a:latin typeface="Calibri" pitchFamily="34" charset="0"/>
+                <a:ea typeface="Calibri" pitchFamily="34" charset="-122"/>
+                <a:cs typeface="Calibri" pitchFamily="34" charset="-120"/>
+              </a:rPr>
+              <a:t>muestra</a:t>
+            </a:r>
+            <a:r>
+              <a:rPr lang="en-US" sz="850" b="1" i="1" dirty="0">
+                <a:solidFill>
+                  <a:schemeClr val="accent6">
+                    <a:lumMod val="75000"/>
+                  </a:schemeClr>
+                </a:solidFill>
+                <a:latin typeface="Calibri" pitchFamily="34" charset="0"/>
+                <a:ea typeface="Calibri" pitchFamily="34" charset="-122"/>
+                <a:cs typeface="Calibri" pitchFamily="34" charset="-120"/>
+              </a:rPr>
+              <a:t>. </a:t>
+            </a:r>
+            <a:r>
+              <a:rPr lang="en-US" sz="850" b="1" i="1" dirty="0" err="1">
+                <a:solidFill>
+                  <a:schemeClr val="accent6">
+                    <a:lumMod val="75000"/>
+                  </a:schemeClr>
+                </a:solidFill>
+                <a:latin typeface="Calibri" pitchFamily="34" charset="0"/>
+                <a:ea typeface="Calibri" pitchFamily="34" charset="-122"/>
+                <a:cs typeface="Calibri" pitchFamily="34" charset="-120"/>
+              </a:rPr>
+              <a:t>Significa</a:t>
+            </a:r>
+            <a:r>
+              <a:rPr lang="en-US" sz="850" b="1" i="1" dirty="0">
+                <a:solidFill>
+                  <a:schemeClr val="accent6">
+                    <a:lumMod val="75000"/>
+                  </a:schemeClr>
+                </a:solidFill>
+                <a:latin typeface="Calibri" pitchFamily="34" charset="0"/>
+                <a:ea typeface="Calibri" pitchFamily="34" charset="-122"/>
+                <a:cs typeface="Calibri" pitchFamily="34" charset="-120"/>
+              </a:rPr>
+              <a:t> </a:t>
+            </a:r>
+            <a:r>
+              <a:rPr lang="en-US" sz="850" b="1" i="1" dirty="0" err="1">
+                <a:solidFill>
+                  <a:schemeClr val="accent6">
+                    <a:lumMod val="75000"/>
+                  </a:schemeClr>
+                </a:solidFill>
+                <a:latin typeface="Calibri" pitchFamily="34" charset="0"/>
+                <a:ea typeface="Calibri" pitchFamily="34" charset="-122"/>
+                <a:cs typeface="Calibri" pitchFamily="34" charset="-120"/>
+              </a:rPr>
+              <a:t>correcto</a:t>
+            </a:r>
+            <a:r>
+              <a:rPr lang="en-US" sz="850" b="1" i="1" dirty="0">
+                <a:solidFill>
+                  <a:schemeClr val="accent6">
+                    <a:lumMod val="75000"/>
+                  </a:schemeClr>
+                </a:solidFill>
+                <a:latin typeface="Calibri" pitchFamily="34" charset="0"/>
+                <a:ea typeface="Calibri" pitchFamily="34" charset="-122"/>
+                <a:cs typeface="Calibri" pitchFamily="34" charset="-120"/>
+              </a:rPr>
+              <a:t> </a:t>
+            </a:r>
+            <a:r>
+              <a:rPr lang="en-US" sz="850" b="1" i="1" dirty="0" err="1">
+                <a:solidFill>
+                  <a:schemeClr val="accent6">
+                    <a:lumMod val="75000"/>
+                  </a:schemeClr>
+                </a:solidFill>
+                <a:latin typeface="Calibri" pitchFamily="34" charset="0"/>
+                <a:ea typeface="Calibri" pitchFamily="34" charset="-122"/>
+                <a:cs typeface="Calibri" pitchFamily="34" charset="-120"/>
+              </a:rPr>
+              <a:t>en</a:t>
+            </a:r>
+            <a:r>
+              <a:rPr lang="en-US" sz="850" b="1" i="1" dirty="0">
+                <a:solidFill>
+                  <a:schemeClr val="accent6">
+                    <a:lumMod val="75000"/>
+                  </a:schemeClr>
+                </a:solidFill>
+                <a:latin typeface="Calibri" pitchFamily="34" charset="0"/>
+                <a:ea typeface="Calibri" pitchFamily="34" charset="-122"/>
+                <a:cs typeface="Calibri" pitchFamily="34" charset="-120"/>
+              </a:rPr>
+              <a:t> </a:t>
+            </a:r>
+            <a:r>
+              <a:rPr lang="en-US" sz="850" b="1" i="1" dirty="0" err="1">
+                <a:solidFill>
+                  <a:schemeClr val="accent6">
+                    <a:lumMod val="75000"/>
+                  </a:schemeClr>
+                </a:solidFill>
+                <a:latin typeface="Calibri" pitchFamily="34" charset="0"/>
+                <a:ea typeface="Calibri" pitchFamily="34" charset="-122"/>
+                <a:cs typeface="Calibri" pitchFamily="34" charset="-120"/>
+              </a:rPr>
+              <a:t>promedio</a:t>
+            </a:r>
+            <a:r>
+              <a:rPr lang="en-US" sz="850" b="1" i="1" dirty="0">
+                <a:solidFill>
+                  <a:schemeClr val="accent6">
+                    <a:lumMod val="75000"/>
+                  </a:schemeClr>
+                </a:solidFill>
+                <a:latin typeface="Calibri" pitchFamily="34" charset="0"/>
+                <a:ea typeface="Calibri" pitchFamily="34" charset="-122"/>
+                <a:cs typeface="Calibri" pitchFamily="34" charset="-120"/>
+              </a:rPr>
+              <a:t> a lo largo de </a:t>
+            </a:r>
+            <a:r>
+              <a:rPr lang="en-US" sz="850" b="1" i="1" dirty="0" err="1">
+                <a:solidFill>
+                  <a:schemeClr val="accent6">
+                    <a:lumMod val="75000"/>
+                  </a:schemeClr>
+                </a:solidFill>
+                <a:latin typeface="Calibri" pitchFamily="34" charset="0"/>
+                <a:ea typeface="Calibri" pitchFamily="34" charset="-122"/>
+                <a:cs typeface="Calibri" pitchFamily="34" charset="-120"/>
+              </a:rPr>
+              <a:t>muchas</a:t>
+            </a:r>
+            <a:r>
+              <a:rPr lang="en-US" sz="850" b="1" i="1" dirty="0">
+                <a:solidFill>
+                  <a:schemeClr val="accent6">
+                    <a:lumMod val="75000"/>
+                  </a:schemeClr>
+                </a:solidFill>
+                <a:latin typeface="Calibri" pitchFamily="34" charset="0"/>
+                <a:ea typeface="Calibri" pitchFamily="34" charset="-122"/>
+                <a:cs typeface="Calibri" pitchFamily="34" charset="-120"/>
+              </a:rPr>
+              <a:t> </a:t>
+            </a:r>
+            <a:r>
+              <a:rPr lang="en-US" sz="850" b="1" i="1" dirty="0" err="1">
+                <a:solidFill>
+                  <a:schemeClr val="accent6">
+                    <a:lumMod val="75000"/>
+                  </a:schemeClr>
+                </a:solidFill>
+                <a:latin typeface="Calibri" pitchFamily="34" charset="0"/>
+                <a:ea typeface="Calibri" pitchFamily="34" charset="-122"/>
+                <a:cs typeface="Calibri" pitchFamily="34" charset="-120"/>
+              </a:rPr>
+              <a:t>muestras</a:t>
+            </a:r>
+            <a:endParaRPr lang="en-US" sz="850" b="1" dirty="0">
+              <a:solidFill>
+                <a:schemeClr val="accent6">
+                  <a:lumMod val="75000"/>
+                </a:schemeClr>
+              </a:solidFill>
+            </a:endParaRPr>
           </a:p>
         </p:txBody>
       </p:sp>
@@ -7044,7 +7345,7 @@
         </p:nvSpPr>
         <p:spPr>
           <a:xfrm>
-            <a:off x="0" y="0"/>
+            <a:off x="0" y="20574"/>
             <a:ext cx="9144000" cy="960120"/>
           </a:xfrm>
           <a:prstGeom prst="rect">
@@ -7133,8 +7434,8 @@
         </p:nvSpPr>
         <p:spPr>
           <a:xfrm>
-            <a:off x="960120" y="182880"/>
-            <a:ext cx="7772400" cy="502920"/>
+            <a:off x="816209" y="100584"/>
+            <a:ext cx="7916311" cy="585216"/>
           </a:xfrm>
           <a:prstGeom prst="rect">
             <a:avLst/>
@@ -7160,7 +7461,50 @@
               </a:rPr>
               <a:t>BLUE — Best Linear Unbiased Estimator</a:t>
             </a:r>
-            <a:endParaRPr lang="en-US" sz="2100" dirty="0"/>
+          </a:p>
+          <a:p>
+            <a:r>
+              <a:rPr lang="en-US" sz="2100" b="1" dirty="0">
+                <a:solidFill>
+                  <a:srgbClr val="1A2B3C"/>
+                </a:solidFill>
+                <a:latin typeface="Trebuchet MS" pitchFamily="34" charset="0"/>
+              </a:rPr>
+              <a:t>MELI -   Mejor </a:t>
+            </a:r>
+            <a:r>
+              <a:rPr lang="en-US" sz="2100" b="1" dirty="0" err="1">
+                <a:solidFill>
+                  <a:srgbClr val="1A2B3C"/>
+                </a:solidFill>
+                <a:latin typeface="Trebuchet MS" pitchFamily="34" charset="0"/>
+              </a:rPr>
+              <a:t>Estimador</a:t>
+            </a:r>
+            <a:r>
+              <a:rPr lang="en-US" sz="2100" b="1" dirty="0">
+                <a:solidFill>
+                  <a:srgbClr val="1A2B3C"/>
+                </a:solidFill>
+                <a:latin typeface="Trebuchet MS" pitchFamily="34" charset="0"/>
+              </a:rPr>
+              <a:t> Lineal </a:t>
+            </a:r>
+            <a:r>
+              <a:rPr lang="en-US" sz="2100" b="1" dirty="0" err="1">
+                <a:solidFill>
+                  <a:srgbClr val="1A2B3C"/>
+                </a:solidFill>
+                <a:latin typeface="Trebuchet MS" pitchFamily="34" charset="0"/>
+              </a:rPr>
+              <a:t>Insesgado</a:t>
+            </a:r>
+            <a:endParaRPr lang="en-US" sz="2100" b="1" dirty="0">
+              <a:solidFill>
+                <a:srgbClr val="1A2B3C"/>
+              </a:solidFill>
+              <a:latin typeface="Trebuchet MS" pitchFamily="34" charset="0"/>
+            </a:endParaRPr>
           </a:p>
         </p:txBody>
       </p:sp>
@@ -10253,6 +10597,13 @@
             <a:prstDash val="solid"/>
           </a:ln>
         </p:spPr>
+        <p:txBody>
+          <a:bodyPr/>
+          <a:lstStyle/>
+          <a:p>
+            <a:endParaRPr lang="en-PE" dirty="0"/>
+          </a:p>
+        </p:txBody>
       </p:sp>
       <p:sp>
         <p:nvSpPr>
